--- a/thesis/PosterDACSN.pptx
+++ b/thesis/PosterDACSN.pptx
@@ -18,16 +18,8 @@
       <p:boldItalic r:id="rId6"/>
     </p:embeddedFont>
     <p:embeddedFont>
-      <p:font typeface="Touvlo" panose="020B0604020202020204" charset="0"/>
-      <p:regular r:id="rId7"/>
-    </p:embeddedFont>
-    <p:embeddedFont>
       <p:font typeface="Calibri Bold" panose="020F0702030404030204" pitchFamily="34" charset="0"/>
-      <p:bold r:id="rId8"/>
-    </p:embeddedFont>
-    <p:embeddedFont>
-      <p:font typeface="Touvlo Bold" panose="020B0604020202020204" charset="0"/>
-      <p:regular r:id="rId9"/>
+      <p:bold r:id="rId7"/>
     </p:embeddedFont>
   </p:embeddedFontLst>
   <p:defaultTextStyle>
@@ -128,12 +120,12 @@
   <p:extLst>
     <p:ext uri="{EFAFB233-063F-42B5-8137-9DF3F51BA10A}">
       <p15:sldGuideLst xmlns:p15="http://schemas.microsoft.com/office/powerpoint/2012/main">
-        <p15:guide id="1" orient="horz" pos="2160">
+        <p15:guide id="1" orient="horz" pos="2160" userDrawn="1">
           <p15:clr>
             <a:srgbClr val="A4A3A4"/>
           </p15:clr>
         </p15:guide>
-        <p15:guide id="2" pos="2880">
+        <p15:guide id="2" pos="2880" userDrawn="1">
           <p15:clr>
             <a:srgbClr val="A4A3A4"/>
           </p15:clr>
@@ -325,8 +317,7 @@
           <a:p>
             <a:fld id="{1D8BD707-D9CF-40AE-B4C6-C98DA3205C09}" type="datetimeFigureOut">
               <a:rPr lang="en-US" smtClean="0"/>
-              <a:pPr/>
-              <a:t>12/27/2025</a:t>
+              <a:t>1/4/2026</a:t>
             </a:fld>
             <a:endParaRPr lang="en-US"/>
           </a:p>
@@ -368,7 +359,6 @@
           <a:p>
             <a:fld id="{B6F15528-21DE-4FAA-801E-634DDDAF4B2B}" type="slidenum">
               <a:rPr lang="en-US" smtClean="0"/>
-              <a:pPr/>
               <a:t>‹#›</a:t>
             </a:fld>
             <a:endParaRPr lang="en-US"/>
@@ -492,8 +482,7 @@
           <a:p>
             <a:fld id="{1D8BD707-D9CF-40AE-B4C6-C98DA3205C09}" type="datetimeFigureOut">
               <a:rPr lang="en-US" smtClean="0"/>
-              <a:pPr/>
-              <a:t>12/27/2025</a:t>
+              <a:t>1/4/2026</a:t>
             </a:fld>
             <a:endParaRPr lang="en-US"/>
           </a:p>
@@ -535,7 +524,6 @@
           <a:p>
             <a:fld id="{B6F15528-21DE-4FAA-801E-634DDDAF4B2B}" type="slidenum">
               <a:rPr lang="en-US" smtClean="0"/>
-              <a:pPr/>
               <a:t>‹#›</a:t>
             </a:fld>
             <a:endParaRPr lang="en-US"/>
@@ -669,8 +657,7 @@
           <a:p>
             <a:fld id="{1D8BD707-D9CF-40AE-B4C6-C98DA3205C09}" type="datetimeFigureOut">
               <a:rPr lang="en-US" smtClean="0"/>
-              <a:pPr/>
-              <a:t>12/27/2025</a:t>
+              <a:t>1/4/2026</a:t>
             </a:fld>
             <a:endParaRPr lang="en-US"/>
           </a:p>
@@ -712,7 +699,6 @@
           <a:p>
             <a:fld id="{B6F15528-21DE-4FAA-801E-634DDDAF4B2B}" type="slidenum">
               <a:rPr lang="en-US" smtClean="0"/>
-              <a:pPr/>
               <a:t>‹#›</a:t>
             </a:fld>
             <a:endParaRPr lang="en-US"/>
@@ -836,8 +822,7 @@
           <a:p>
             <a:fld id="{1D8BD707-D9CF-40AE-B4C6-C98DA3205C09}" type="datetimeFigureOut">
               <a:rPr lang="en-US" smtClean="0"/>
-              <a:pPr/>
-              <a:t>12/27/2025</a:t>
+              <a:t>1/4/2026</a:t>
             </a:fld>
             <a:endParaRPr lang="en-US"/>
           </a:p>
@@ -879,7 +864,6 @@
           <a:p>
             <a:fld id="{B6F15528-21DE-4FAA-801E-634DDDAF4B2B}" type="slidenum">
               <a:rPr lang="en-US" smtClean="0"/>
-              <a:pPr/>
               <a:t>‹#›</a:t>
             </a:fld>
             <a:endParaRPr lang="en-US"/>
@@ -1079,8 +1063,7 @@
           <a:p>
             <a:fld id="{1D8BD707-D9CF-40AE-B4C6-C98DA3205C09}" type="datetimeFigureOut">
               <a:rPr lang="en-US" smtClean="0"/>
-              <a:pPr/>
-              <a:t>12/27/2025</a:t>
+              <a:t>1/4/2026</a:t>
             </a:fld>
             <a:endParaRPr lang="en-US"/>
           </a:p>
@@ -1122,7 +1105,6 @@
           <a:p>
             <a:fld id="{B6F15528-21DE-4FAA-801E-634DDDAF4B2B}" type="slidenum">
               <a:rPr lang="en-US" smtClean="0"/>
-              <a:pPr/>
               <a:t>‹#›</a:t>
             </a:fld>
             <a:endParaRPr lang="en-US"/>
@@ -1364,8 +1346,7 @@
           <a:p>
             <a:fld id="{1D8BD707-D9CF-40AE-B4C6-C98DA3205C09}" type="datetimeFigureOut">
               <a:rPr lang="en-US" smtClean="0"/>
-              <a:pPr/>
-              <a:t>12/27/2025</a:t>
+              <a:t>1/4/2026</a:t>
             </a:fld>
             <a:endParaRPr lang="en-US"/>
           </a:p>
@@ -1407,7 +1388,6 @@
           <a:p>
             <a:fld id="{B6F15528-21DE-4FAA-801E-634DDDAF4B2B}" type="slidenum">
               <a:rPr lang="en-US" smtClean="0"/>
-              <a:pPr/>
               <a:t>‹#›</a:t>
             </a:fld>
             <a:endParaRPr lang="en-US"/>
@@ -1783,8 +1763,7 @@
           <a:p>
             <a:fld id="{1D8BD707-D9CF-40AE-B4C6-C98DA3205C09}" type="datetimeFigureOut">
               <a:rPr lang="en-US" smtClean="0"/>
-              <a:pPr/>
-              <a:t>12/27/2025</a:t>
+              <a:t>1/4/2026</a:t>
             </a:fld>
             <a:endParaRPr lang="en-US"/>
           </a:p>
@@ -1826,7 +1805,6 @@
           <a:p>
             <a:fld id="{B6F15528-21DE-4FAA-801E-634DDDAF4B2B}" type="slidenum">
               <a:rPr lang="en-US" smtClean="0"/>
-              <a:pPr/>
               <a:t>‹#›</a:t>
             </a:fld>
             <a:endParaRPr lang="en-US"/>
@@ -1898,8 +1876,7 @@
           <a:p>
             <a:fld id="{1D8BD707-D9CF-40AE-B4C6-C98DA3205C09}" type="datetimeFigureOut">
               <a:rPr lang="en-US" smtClean="0"/>
-              <a:pPr/>
-              <a:t>12/27/2025</a:t>
+              <a:t>1/4/2026</a:t>
             </a:fld>
             <a:endParaRPr lang="en-US"/>
           </a:p>
@@ -1941,7 +1918,6 @@
           <a:p>
             <a:fld id="{B6F15528-21DE-4FAA-801E-634DDDAF4B2B}" type="slidenum">
               <a:rPr lang="en-US" smtClean="0"/>
-              <a:pPr/>
               <a:t>‹#›</a:t>
             </a:fld>
             <a:endParaRPr lang="en-US"/>
@@ -1990,8 +1966,7 @@
           <a:p>
             <a:fld id="{1D8BD707-D9CF-40AE-B4C6-C98DA3205C09}" type="datetimeFigureOut">
               <a:rPr lang="en-US" smtClean="0"/>
-              <a:pPr/>
-              <a:t>12/27/2025</a:t>
+              <a:t>1/4/2026</a:t>
             </a:fld>
             <a:endParaRPr lang="en-US"/>
           </a:p>
@@ -2033,7 +2008,6 @@
           <a:p>
             <a:fld id="{B6F15528-21DE-4FAA-801E-634DDDAF4B2B}" type="slidenum">
               <a:rPr lang="en-US" smtClean="0"/>
-              <a:pPr/>
               <a:t>‹#›</a:t>
             </a:fld>
             <a:endParaRPr lang="en-US"/>
@@ -2264,8 +2238,7 @@
           <a:p>
             <a:fld id="{1D8BD707-D9CF-40AE-B4C6-C98DA3205C09}" type="datetimeFigureOut">
               <a:rPr lang="en-US" smtClean="0"/>
-              <a:pPr/>
-              <a:t>12/27/2025</a:t>
+              <a:t>1/4/2026</a:t>
             </a:fld>
             <a:endParaRPr lang="en-US"/>
           </a:p>
@@ -2307,7 +2280,6 @@
           <a:p>
             <a:fld id="{B6F15528-21DE-4FAA-801E-634DDDAF4B2B}" type="slidenum">
               <a:rPr lang="en-US" smtClean="0"/>
-              <a:pPr/>
               <a:t>‹#›</a:t>
             </a:fld>
             <a:endParaRPr lang="en-US"/>
@@ -2514,8 +2486,7 @@
           <a:p>
             <a:fld id="{1D8BD707-D9CF-40AE-B4C6-C98DA3205C09}" type="datetimeFigureOut">
               <a:rPr lang="en-US" smtClean="0"/>
-              <a:pPr/>
-              <a:t>12/27/2025</a:t>
+              <a:t>1/4/2026</a:t>
             </a:fld>
             <a:endParaRPr lang="en-US"/>
           </a:p>
@@ -2557,7 +2528,6 @@
           <a:p>
             <a:fld id="{B6F15528-21DE-4FAA-801E-634DDDAF4B2B}" type="slidenum">
               <a:rPr lang="en-US" smtClean="0"/>
-              <a:pPr/>
               <a:t>‹#›</a:t>
             </a:fld>
             <a:endParaRPr lang="en-US"/>
@@ -2724,8 +2694,7 @@
           <a:p>
             <a:fld id="{1D8BD707-D9CF-40AE-B4C6-C98DA3205C09}" type="datetimeFigureOut">
               <a:rPr lang="en-US" smtClean="0"/>
-              <a:pPr/>
-              <a:t>12/27/2025</a:t>
+              <a:t>1/4/2026</a:t>
             </a:fld>
             <a:endParaRPr lang="en-US"/>
           </a:p>
@@ -2803,7 +2772,6 @@
           <a:p>
             <a:fld id="{B6F15528-21DE-4FAA-801E-634DDDAF4B2B}" type="slidenum">
               <a:rPr lang="en-US" smtClean="0"/>
-              <a:pPr/>
               <a:t>‹#›</a:t>
             </a:fld>
             <a:endParaRPr lang="en-US"/>
@@ -2848,7 +2816,7 @@
         <a:spcBef>
           <a:spcPct val="20000"/>
         </a:spcBef>
-        <a:buFont typeface="Arial" pitchFamily="34" charset="0"/>
+        <a:buFont typeface="Arial" panose="020B0604020202020204" pitchFamily="34" charset="0"/>
         <a:buChar char="•"/>
         <a:defRPr sz="3200" kern="1200">
           <a:solidFill>
@@ -2863,7 +2831,7 @@
         <a:spcBef>
           <a:spcPct val="20000"/>
         </a:spcBef>
-        <a:buFont typeface="Arial" pitchFamily="34" charset="0"/>
+        <a:buFont typeface="Arial" panose="020B0604020202020204" pitchFamily="34" charset="0"/>
         <a:buChar char="–"/>
         <a:defRPr sz="2800" kern="1200">
           <a:solidFill>
@@ -2878,7 +2846,7 @@
         <a:spcBef>
           <a:spcPct val="20000"/>
         </a:spcBef>
-        <a:buFont typeface="Arial" pitchFamily="34" charset="0"/>
+        <a:buFont typeface="Arial" panose="020B0604020202020204" pitchFamily="34" charset="0"/>
         <a:buChar char="•"/>
         <a:defRPr sz="2400" kern="1200">
           <a:solidFill>
@@ -2893,7 +2861,7 @@
         <a:spcBef>
           <a:spcPct val="20000"/>
         </a:spcBef>
-        <a:buFont typeface="Arial" pitchFamily="34" charset="0"/>
+        <a:buFont typeface="Arial" panose="020B0604020202020204" pitchFamily="34" charset="0"/>
         <a:buChar char="–"/>
         <a:defRPr sz="2000" kern="1200">
           <a:solidFill>
@@ -2908,7 +2876,7 @@
         <a:spcBef>
           <a:spcPct val="20000"/>
         </a:spcBef>
-        <a:buFont typeface="Arial" pitchFamily="34" charset="0"/>
+        <a:buFont typeface="Arial" panose="020B0604020202020204" pitchFamily="34" charset="0"/>
         <a:buChar char="»"/>
         <a:defRPr sz="2000" kern="1200">
           <a:solidFill>
@@ -2923,7 +2891,7 @@
         <a:spcBef>
           <a:spcPct val="20000"/>
         </a:spcBef>
-        <a:buFont typeface="Arial" pitchFamily="34" charset="0"/>
+        <a:buFont typeface="Arial" panose="020B0604020202020204" pitchFamily="34" charset="0"/>
         <a:buChar char="•"/>
         <a:defRPr sz="2000" kern="1200">
           <a:solidFill>
@@ -2938,7 +2906,7 @@
         <a:spcBef>
           <a:spcPct val="20000"/>
         </a:spcBef>
-        <a:buFont typeface="Arial" pitchFamily="34" charset="0"/>
+        <a:buFont typeface="Arial" panose="020B0604020202020204" pitchFamily="34" charset="0"/>
         <a:buChar char="•"/>
         <a:defRPr sz="2000" kern="1200">
           <a:solidFill>
@@ -2953,7 +2921,7 @@
         <a:spcBef>
           <a:spcPct val="20000"/>
         </a:spcBef>
-        <a:buFont typeface="Arial" pitchFamily="34" charset="0"/>
+        <a:buFont typeface="Arial" panose="020B0604020202020204" pitchFamily="34" charset="0"/>
         <a:buChar char="•"/>
         <a:defRPr sz="2000" kern="1200">
           <a:solidFill>
@@ -2968,7 +2936,7 @@
         <a:spcBef>
           <a:spcPct val="20000"/>
         </a:spcBef>
-        <a:buFont typeface="Arial" pitchFamily="34" charset="0"/>
+        <a:buFont typeface="Arial" panose="020B0604020202020204" pitchFamily="34" charset="0"/>
         <a:buChar char="•"/>
         <a:defRPr sz="2000" kern="1200">
           <a:solidFill>
@@ -3106,222 +3074,104 @@
           <a:chExt cx="0" cy="0"/>
         </a:xfrm>
       </p:grpSpPr>
-      <p:grpSp>
-        <p:nvGrpSpPr>
-          <p:cNvPr id="2" name="Group 2"/>
-          <p:cNvGrpSpPr/>
+      <p:sp>
+        <p:nvSpPr>
+          <p:cNvPr id="3" name="Freeform 3"/>
+          <p:cNvSpPr/>
           <p:nvPr/>
-        </p:nvGrpSpPr>
-        <p:grpSpPr>
-          <a:xfrm>
-            <a:off x="546101" y="456806"/>
-            <a:ext cx="14020798" cy="2806477"/>
-            <a:chOff x="0" y="0"/>
-            <a:chExt cx="2413391" cy="522197"/>
-          </a:xfrm>
+        </p:nvSpPr>
+        <p:spPr>
+          <a:xfrm>
+            <a:off x="24373" y="1568094"/>
+            <a:ext cx="15088625" cy="1860322"/>
+          </a:xfrm>
+          <a:custGeom>
+            <a:avLst/>
+            <a:gdLst/>
+            <a:ahLst/>
+            <a:cxnLst/>
+            <a:rect l="l" t="t" r="r" b="b"/>
+            <a:pathLst>
+              <a:path w="2413391" h="522197">
+                <a:moveTo>
+                  <a:pt x="0" y="0"/>
+                </a:moveTo>
+                <a:lnTo>
+                  <a:pt x="2413391" y="0"/>
+                </a:lnTo>
+                <a:lnTo>
+                  <a:pt x="2413391" y="522197"/>
+                </a:lnTo>
+                <a:lnTo>
+                  <a:pt x="0" y="522197"/>
+                </a:lnTo>
+                <a:close/>
+              </a:path>
+            </a:pathLst>
+          </a:custGeom>
           <a:solidFill>
             <a:schemeClr val="bg1">
               <a:lumMod val="95000"/>
             </a:schemeClr>
           </a:solidFill>
-        </p:grpSpPr>
-        <p:sp>
-          <p:nvSpPr>
-            <p:cNvPr id="3" name="Freeform 3"/>
-            <p:cNvSpPr/>
-            <p:nvPr/>
-          </p:nvSpPr>
-          <p:spPr>
-            <a:xfrm>
-              <a:off x="0" y="0"/>
-              <a:ext cx="2413391" cy="522197"/>
-            </a:xfrm>
-            <a:custGeom>
-              <a:avLst/>
-              <a:gdLst/>
-              <a:ahLst/>
-              <a:cxnLst/>
-              <a:rect l="l" t="t" r="r" b="b"/>
-              <a:pathLst>
-                <a:path w="2413391" h="522197">
-                  <a:moveTo>
-                    <a:pt x="0" y="0"/>
-                  </a:moveTo>
-                  <a:lnTo>
-                    <a:pt x="2413391" y="0"/>
-                  </a:lnTo>
-                  <a:lnTo>
-                    <a:pt x="2413391" y="522197"/>
-                  </a:lnTo>
-                  <a:lnTo>
-                    <a:pt x="0" y="522197"/>
-                  </a:lnTo>
-                  <a:close/>
-                </a:path>
-              </a:pathLst>
-            </a:custGeom>
-            <a:grpFill/>
-            <a:ln w="19050" cap="sq">
-              <a:solidFill>
-                <a:schemeClr val="accent1">
-                  <a:lumMod val="60000"/>
-                  <a:lumOff val="40000"/>
-                </a:schemeClr>
-              </a:solidFill>
-              <a:prstDash val="solid"/>
-              <a:miter/>
-            </a:ln>
-          </p:spPr>
-        </p:sp>
-        <p:sp>
-          <p:nvSpPr>
-            <p:cNvPr id="4" name="TextBox 4"/>
-            <p:cNvSpPr txBox="1"/>
-            <p:nvPr/>
-          </p:nvSpPr>
-          <p:spPr>
-            <a:xfrm>
-              <a:off x="0" y="-47625"/>
-              <a:ext cx="2413391" cy="569822"/>
-            </a:xfrm>
-            <a:prstGeom prst="rect">
-              <a:avLst/>
-            </a:prstGeom>
-            <a:grpFill/>
-            <a:ln w="19050">
-              <a:solidFill>
-                <a:schemeClr val="accent1">
-                  <a:lumMod val="60000"/>
-                  <a:lumOff val="40000"/>
-                </a:schemeClr>
-              </a:solidFill>
-            </a:ln>
-          </p:spPr>
-          <p:txBody>
-            <a:bodyPr lIns="44941" tIns="44941" rIns="44941" bIns="44941" rtlCol="0" anchor="ctr"/>
-            <a:lstStyle/>
-            <a:p>
-              <a:pPr algn="ctr">
-                <a:lnSpc>
-                  <a:spcPts val="3839"/>
-                </a:lnSpc>
-                <a:spcBef>
-                  <a:spcPct val="0"/>
-                </a:spcBef>
-              </a:pPr>
-              <a:endParaRPr>
-                <a:solidFill>
-                  <a:schemeClr val="bg1">
-                    <a:lumMod val="75000"/>
-                  </a:schemeClr>
-                </a:solidFill>
-              </a:endParaRPr>
-            </a:p>
-          </p:txBody>
-        </p:sp>
-      </p:grpSp>
-      <p:grpSp>
-        <p:nvGrpSpPr>
-          <p:cNvPr id="5" name="Group 5"/>
-          <p:cNvGrpSpPr/>
+          <a:ln w="28575" cap="sq" cmpd="sng">
+            <a:solidFill>
+              <a:schemeClr val="tx1"/>
+            </a:solidFill>
+            <a:prstDash val="lgDashDot"/>
+            <a:miter/>
+          </a:ln>
+        </p:spPr>
+      </p:sp>
+      <p:sp>
+        <p:nvSpPr>
+          <p:cNvPr id="6" name="Freeform 6"/>
+          <p:cNvSpPr/>
           <p:nvPr/>
-        </p:nvGrpSpPr>
-        <p:grpSpPr>
-          <a:xfrm>
-            <a:off x="546101" y="3524249"/>
-            <a:ext cx="7013900" cy="2362201"/>
-            <a:chOff x="0" y="0"/>
-            <a:chExt cx="1206695" cy="468576"/>
-          </a:xfrm>
-        </p:grpSpPr>
-        <p:sp>
-          <p:nvSpPr>
-            <p:cNvPr id="6" name="Freeform 6"/>
-            <p:cNvSpPr/>
-            <p:nvPr/>
-          </p:nvSpPr>
-          <p:spPr>
-            <a:xfrm>
-              <a:off x="0" y="0"/>
-              <a:ext cx="1206695" cy="468576"/>
-            </a:xfrm>
-            <a:custGeom>
-              <a:avLst/>
-              <a:gdLst/>
-              <a:ahLst/>
-              <a:cxnLst/>
-              <a:rect l="l" t="t" r="r" b="b"/>
-              <a:pathLst>
-                <a:path w="1206695" h="468576">
-                  <a:moveTo>
-                    <a:pt x="0" y="0"/>
-                  </a:moveTo>
-                  <a:lnTo>
-                    <a:pt x="1206695" y="0"/>
-                  </a:lnTo>
-                  <a:lnTo>
-                    <a:pt x="1206695" y="468576"/>
-                  </a:lnTo>
-                  <a:lnTo>
-                    <a:pt x="0" y="468576"/>
-                  </a:lnTo>
-                  <a:close/>
-                </a:path>
-              </a:pathLst>
-            </a:custGeom>
+        </p:nvSpPr>
+        <p:spPr>
+          <a:xfrm>
+            <a:off x="53437" y="3562479"/>
+            <a:ext cx="7438537" cy="2296161"/>
+          </a:xfrm>
+          <a:custGeom>
+            <a:avLst/>
+            <a:gdLst/>
+            <a:ahLst/>
+            <a:cxnLst/>
+            <a:rect l="l" t="t" r="r" b="b"/>
+            <a:pathLst>
+              <a:path w="1206695" h="468576">
+                <a:moveTo>
+                  <a:pt x="0" y="0"/>
+                </a:moveTo>
+                <a:lnTo>
+                  <a:pt x="1206695" y="0"/>
+                </a:lnTo>
+                <a:lnTo>
+                  <a:pt x="1206695" y="468576"/>
+                </a:lnTo>
+                <a:lnTo>
+                  <a:pt x="0" y="468576"/>
+                </a:lnTo>
+                <a:close/>
+              </a:path>
+            </a:pathLst>
+          </a:custGeom>
+          <a:solidFill>
+            <a:schemeClr val="bg1">
+              <a:lumMod val="95000"/>
+            </a:schemeClr>
+          </a:solidFill>
+          <a:ln w="28575" cap="sq" cmpd="sng">
             <a:solidFill>
-              <a:schemeClr val="bg1">
-                <a:lumMod val="95000"/>
-              </a:schemeClr>
+              <a:schemeClr val="tx1"/>
             </a:solidFill>
-            <a:ln w="19050" cap="sq">
-              <a:solidFill>
-                <a:schemeClr val="accent1">
-                  <a:lumMod val="60000"/>
-                  <a:lumOff val="40000"/>
-                </a:schemeClr>
-              </a:solidFill>
-              <a:prstDash val="solid"/>
-              <a:miter/>
-            </a:ln>
-          </p:spPr>
-        </p:sp>
-        <p:sp>
-          <p:nvSpPr>
-            <p:cNvPr id="7" name="TextBox 7"/>
-            <p:cNvSpPr txBox="1"/>
-            <p:nvPr/>
-          </p:nvSpPr>
-          <p:spPr>
-            <a:xfrm>
-              <a:off x="0" y="-47625"/>
-              <a:ext cx="1206695" cy="516201"/>
-            </a:xfrm>
-            <a:prstGeom prst="rect">
-              <a:avLst/>
-            </a:prstGeom>
-          </p:spPr>
-          <p:txBody>
-            <a:bodyPr lIns="44941" tIns="44941" rIns="44941" bIns="44941" rtlCol="0" anchor="ctr"/>
-            <a:lstStyle/>
-            <a:p>
-              <a:pPr algn="ctr">
-                <a:lnSpc>
-                  <a:spcPts val="3839"/>
-                </a:lnSpc>
-                <a:spcBef>
-                  <a:spcPct val="0"/>
-                </a:spcBef>
-              </a:pPr>
-              <a:endParaRPr>
-                <a:solidFill>
-                  <a:srgbClr val="F2F2EF"/>
-                </a:solidFill>
-              </a:endParaRPr>
-            </a:p>
-          </p:txBody>
-        </p:sp>
-      </p:grpSp>
+            <a:prstDash val="lgDashDot"/>
+            <a:miter/>
+          </a:ln>
+        </p:spPr>
+      </p:sp>
       <p:grpSp>
         <p:nvGrpSpPr>
           <p:cNvPr id="10" name="Group 10"/>
@@ -3330,8 +3180,8 @@
         </p:nvGrpSpPr>
         <p:grpSpPr>
           <a:xfrm>
-            <a:off x="546101" y="6097443"/>
-            <a:ext cx="7010751" cy="2856799"/>
+            <a:off x="24372" y="6074126"/>
+            <a:ext cx="7439725" cy="2899165"/>
             <a:chOff x="0" y="0"/>
             <a:chExt cx="1206695" cy="1306406"/>
           </a:xfrm>
@@ -3376,14 +3226,11 @@
                 <a:lumMod val="95000"/>
               </a:schemeClr>
             </a:solidFill>
-            <a:ln w="19050" cap="sq">
+            <a:ln w="28575" cap="sq" cmpd="sng">
               <a:solidFill>
-                <a:schemeClr val="accent1">
-                  <a:lumMod val="60000"/>
-                  <a:lumOff val="40000"/>
-                </a:schemeClr>
+                <a:schemeClr val="tx1"/>
               </a:solidFill>
-              <a:prstDash val="solid"/>
+              <a:prstDash val="lgDashDot"/>
               <a:miter/>
             </a:ln>
           </p:spPr>
@@ -3402,6 +3249,18 @@
             <a:prstGeom prst="rect">
               <a:avLst/>
             </a:prstGeom>
+            <a:solidFill>
+              <a:schemeClr val="bg1">
+                <a:lumMod val="95000"/>
+              </a:schemeClr>
+            </a:solidFill>
+            <a:ln w="28575" cap="sq" cmpd="sng">
+              <a:solidFill>
+                <a:schemeClr val="tx1"/>
+              </a:solidFill>
+              <a:prstDash val="lgDashDot"/>
+              <a:miter/>
+            </a:ln>
           </p:spPr>
           <p:txBody>
             <a:bodyPr lIns="44941" tIns="44941" rIns="44941" bIns="44941" rtlCol="0" anchor="ctr"/>
@@ -3409,7 +3268,7 @@
             <a:p>
               <a:pPr algn="ctr">
                 <a:lnSpc>
-                  <a:spcPts val="3839"/>
+                  <a:spcPts val="3840"/>
                 </a:lnSpc>
                 <a:spcBef>
                   <a:spcPct val="0"/>
@@ -3428,8 +3287,8 @@
         </p:nvGrpSpPr>
         <p:grpSpPr>
           <a:xfrm>
-            <a:off x="7890420" y="3524249"/>
-            <a:ext cx="6676479" cy="2362201"/>
+            <a:off x="7628999" y="3748385"/>
+            <a:ext cx="7395102" cy="2138065"/>
             <a:chOff x="0" y="0"/>
             <a:chExt cx="1170533" cy="465858"/>
           </a:xfrm>
@@ -3474,14 +3333,11 @@
                 <a:lumMod val="95000"/>
               </a:schemeClr>
             </a:solidFill>
-            <a:ln w="19050" cap="sq">
+            <a:ln w="28575" cap="sq" cmpd="sng">
               <a:solidFill>
-                <a:schemeClr val="accent1">
-                  <a:lumMod val="60000"/>
-                  <a:lumOff val="40000"/>
-                </a:schemeClr>
+                <a:schemeClr val="tx1"/>
               </a:solidFill>
-              <a:prstDash val="solid"/>
+              <a:prstDash val="lgDashDot"/>
               <a:miter/>
             </a:ln>
           </p:spPr>
@@ -3500,6 +3356,18 @@
             <a:prstGeom prst="rect">
               <a:avLst/>
             </a:prstGeom>
+            <a:solidFill>
+              <a:schemeClr val="bg1">
+                <a:lumMod val="95000"/>
+              </a:schemeClr>
+            </a:solidFill>
+            <a:ln w="28575" cap="sq" cmpd="sng">
+              <a:solidFill>
+                <a:schemeClr val="tx1"/>
+              </a:solidFill>
+              <a:prstDash val="lgDashDot"/>
+              <a:miter/>
+            </a:ln>
           </p:spPr>
           <p:txBody>
             <a:bodyPr lIns="44941" tIns="44941" rIns="44941" bIns="44941" rtlCol="0" anchor="ctr"/>
@@ -3507,7 +3375,7 @@
             <a:p>
               <a:pPr algn="ctr">
                 <a:lnSpc>
-                  <a:spcPts val="3839"/>
+                  <a:spcPts val="3840"/>
                 </a:lnSpc>
                 <a:spcBef>
                   <a:spcPct val="0"/>
@@ -3526,8 +3394,8 @@
         </p:nvSpPr>
         <p:spPr>
           <a:xfrm>
-            <a:off x="622300" y="12217248"/>
-            <a:ext cx="6934553" cy="2720994"/>
+            <a:off x="53437" y="12127663"/>
+            <a:ext cx="7410660" cy="2766923"/>
           </a:xfrm>
           <a:custGeom>
             <a:avLst/>
@@ -3558,14 +3426,11 @@
               <a:lumMod val="95000"/>
             </a:schemeClr>
           </a:solidFill>
-          <a:ln w="19050" cap="sq">
+          <a:ln w="28575" cap="sq" cmpd="sng">
             <a:solidFill>
-              <a:schemeClr val="accent1">
-                <a:lumMod val="60000"/>
-                <a:lumOff val="40000"/>
-              </a:schemeClr>
+              <a:schemeClr val="tx1"/>
             </a:solidFill>
-            <a:prstDash val="solid"/>
+            <a:prstDash val="lgDashDot"/>
             <a:miter/>
           </a:ln>
         </p:spPr>
@@ -3578,8 +3443,8 @@
         </p:nvGrpSpPr>
         <p:grpSpPr>
           <a:xfrm>
-            <a:off x="7937499" y="15868650"/>
-            <a:ext cx="6629399" cy="2632028"/>
+            <a:off x="7745935" y="16097250"/>
+            <a:ext cx="7278165" cy="2227659"/>
             <a:chOff x="0" y="0"/>
             <a:chExt cx="1170533" cy="381732"/>
           </a:xfrm>
@@ -3624,14 +3489,11 @@
                 <a:lumMod val="95000"/>
               </a:schemeClr>
             </a:solidFill>
-            <a:ln w="19050" cap="sq">
+            <a:ln w="28575" cap="sq" cmpd="sng">
               <a:solidFill>
-                <a:schemeClr val="accent1">
-                  <a:lumMod val="60000"/>
-                  <a:lumOff val="40000"/>
-                </a:schemeClr>
+                <a:schemeClr val="tx1"/>
               </a:solidFill>
-              <a:prstDash val="solid"/>
+              <a:prstDash val="lgDashDot"/>
               <a:miter/>
             </a:ln>
           </p:spPr>
@@ -3650,6 +3512,18 @@
             <a:prstGeom prst="rect">
               <a:avLst/>
             </a:prstGeom>
+            <a:solidFill>
+              <a:schemeClr val="bg1">
+                <a:lumMod val="95000"/>
+              </a:schemeClr>
+            </a:solidFill>
+            <a:ln w="28575" cap="sq" cmpd="sng">
+              <a:solidFill>
+                <a:schemeClr val="tx1"/>
+              </a:solidFill>
+              <a:prstDash val="lgDashDot"/>
+              <a:miter/>
+            </a:ln>
           </p:spPr>
           <p:txBody>
             <a:bodyPr lIns="44941" tIns="44941" rIns="44941" bIns="44941" rtlCol="0" anchor="ctr"/>
@@ -3657,7 +3531,7 @@
             <a:p>
               <a:pPr algn="ctr">
                 <a:lnSpc>
-                  <a:spcPts val="3839"/>
+                  <a:spcPts val="3840"/>
                 </a:lnSpc>
                 <a:spcBef>
                   <a:spcPct val="0"/>
@@ -3676,7 +3550,7 @@
         </p:nvSpPr>
         <p:spPr>
           <a:xfrm>
-            <a:off x="546100" y="4057650"/>
+            <a:off x="77598" y="4210050"/>
             <a:ext cx="4659502" cy="0"/>
           </a:xfrm>
           <a:prstGeom prst="line">
@@ -3700,7 +3574,7 @@
         </p:nvSpPr>
         <p:spPr>
           <a:xfrm>
-            <a:off x="535951" y="6572250"/>
+            <a:off x="12700" y="6572250"/>
             <a:ext cx="5039349" cy="0"/>
           </a:xfrm>
           <a:prstGeom prst="line">
@@ -3724,7 +3598,7 @@
         </p:nvSpPr>
         <p:spPr>
           <a:xfrm>
-            <a:off x="7890421" y="4144319"/>
+            <a:off x="7632700" y="4144319"/>
             <a:ext cx="4115253" cy="0"/>
           </a:xfrm>
           <a:prstGeom prst="line">
@@ -3748,7 +3622,7 @@
         </p:nvSpPr>
         <p:spPr>
           <a:xfrm>
-            <a:off x="622300" y="12820650"/>
+            <a:off x="59560" y="12820650"/>
             <a:ext cx="4982340" cy="0"/>
           </a:xfrm>
           <a:prstGeom prst="line">
@@ -3772,8 +3646,8 @@
         </p:nvSpPr>
         <p:spPr>
           <a:xfrm>
-            <a:off x="573460" y="18499003"/>
-            <a:ext cx="7086599" cy="2575473"/>
+            <a:off x="53437" y="18324910"/>
+            <a:ext cx="7438538" cy="2871000"/>
           </a:xfrm>
           <a:custGeom>
             <a:avLst/>
@@ -3804,14 +3678,11 @@
               <a:lumMod val="95000"/>
             </a:schemeClr>
           </a:solidFill>
-          <a:ln w="19050" cap="sq">
+          <a:ln w="28575" cap="sq" cmpd="sng">
             <a:solidFill>
-              <a:schemeClr val="accent1">
-                <a:lumMod val="60000"/>
-                <a:lumOff val="40000"/>
-              </a:schemeClr>
+              <a:schemeClr val="tx1"/>
             </a:solidFill>
-            <a:prstDash val="solid"/>
+            <a:prstDash val="lgDashDot"/>
             <a:miter/>
           </a:ln>
         </p:spPr>
@@ -3824,7 +3695,7 @@
         </p:nvSpPr>
         <p:spPr>
           <a:xfrm>
-            <a:off x="622300" y="19069050"/>
+            <a:off x="12700" y="19069050"/>
             <a:ext cx="4634035" cy="0"/>
           </a:xfrm>
           <a:prstGeom prst="line">
@@ -3848,8 +3719,8 @@
         </p:nvSpPr>
         <p:spPr>
           <a:xfrm>
-            <a:off x="622300" y="273725"/>
-            <a:ext cx="13716000" cy="2031325"/>
+            <a:off x="622300" y="1616212"/>
+            <a:ext cx="13716000" cy="1916747"/>
           </a:xfrm>
           <a:prstGeom prst="rect">
             <a:avLst/>
@@ -3857,44 +3728,44 @@
         </p:spPr>
         <p:txBody>
           <a:bodyPr wrap="square" lIns="0" tIns="0" rIns="0" bIns="0" rtlCol="0" anchor="t">
-            <a:spAutoFit/>
+            <a:noAutofit/>
           </a:bodyPr>
           <a:lstStyle/>
           <a:p>
             <a:pPr algn="ctr"/>
             <a:r>
-              <a:rPr lang="en-US" sz="6600" b="1">
+              <a:rPr lang="en-US" sz="6000" b="1">
                 <a:solidFill>
                   <a:srgbClr val="001D7A"/>
                 </a:solidFill>
                 <a:latin typeface="Calibri Bold" panose="020F0702030404030204" pitchFamily="34" charset="0"/>
-                <a:ea typeface="Touvlo"/>
+                <a:ea typeface="Touvlo" panose="020B0604030403020204"/>
                 <a:cs typeface="Calibri Bold" panose="020F0702030404030204" pitchFamily="34" charset="0"/>
-                <a:sym typeface="Touvlo"/>
+                <a:sym typeface="Touvlo" panose="020B0604030403020204"/>
               </a:rPr>
               <a:t>THIẾT KẾ WEBSITE QUẢN LÝ THƯ VIỆN </a:t>
             </a:r>
             <a:r>
-              <a:rPr lang="en-US" sz="6600" b="1" smtClean="0">
+              <a:rPr lang="en-US" sz="6000" b="1" smtClean="0">
                 <a:solidFill>
                   <a:srgbClr val="001D7A"/>
                 </a:solidFill>
                 <a:latin typeface="Calibri Bold" panose="020F0702030404030204" pitchFamily="34" charset="0"/>
-                <a:ea typeface="Touvlo"/>
+                <a:ea typeface="Touvlo" panose="020B0604030403020204"/>
                 <a:cs typeface="Calibri Bold" panose="020F0702030404030204" pitchFamily="34" charset="0"/>
-                <a:sym typeface="Touvlo"/>
+                <a:sym typeface="Touvlo" panose="020B0604030403020204"/>
               </a:rPr>
               <a:t>TRƯỜNG </a:t>
             </a:r>
             <a:r>
-              <a:rPr lang="en-US" sz="6600" b="1">
+              <a:rPr lang="en-US" sz="6000" b="1">
                 <a:solidFill>
                   <a:srgbClr val="001D7A"/>
                 </a:solidFill>
                 <a:latin typeface="Calibri Bold" panose="020F0702030404030204" pitchFamily="34" charset="0"/>
-                <a:ea typeface="Touvlo"/>
+                <a:ea typeface="Touvlo" panose="020B0604030403020204"/>
                 <a:cs typeface="Calibri Bold" panose="020F0702030404030204" pitchFamily="34" charset="0"/>
-                <a:sym typeface="Touvlo"/>
+                <a:sym typeface="Touvlo" panose="020B0604030403020204"/>
               </a:rPr>
               <a:t>ĐẠI HỌC TRÀ VINH</a:t>
             </a:r>
@@ -3909,7 +3780,7 @@
         </p:nvSpPr>
         <p:spPr>
           <a:xfrm>
-            <a:off x="622300" y="3600450"/>
+            <a:off x="180992" y="3748385"/>
             <a:ext cx="4860908" cy="461665"/>
           </a:xfrm>
           <a:prstGeom prst="rect">
@@ -3924,7 +3795,7 @@
           <a:p>
             <a:pPr>
               <a:lnSpc>
-                <a:spcPts val="3591"/>
+                <a:spcPts val="3590"/>
               </a:lnSpc>
             </a:pPr>
             <a:r>
@@ -3933,9 +3804,9 @@
                   <a:srgbClr val="001D7A"/>
                 </a:solidFill>
                 <a:latin typeface="Calibri Bold" panose="020F0702030404030204" pitchFamily="34" charset="0"/>
-                <a:ea typeface="Touvlo Bold"/>
+                <a:ea typeface="Touvlo Bold" panose="020B0804030403020204"/>
                 <a:cs typeface="Calibri Bold" panose="020F0702030404030204" pitchFamily="34" charset="0"/>
-                <a:sym typeface="Touvlo Bold"/>
+                <a:sym typeface="Touvlo Bold" panose="020B0804030403020204"/>
               </a:rPr>
               <a:t>LÝ DO CHỌN ĐỀ TÀI</a:t>
             </a:r>
@@ -3950,7 +3821,7 @@
         </p:nvSpPr>
         <p:spPr>
           <a:xfrm>
-            <a:off x="622300" y="6156007"/>
+            <a:off x="53437" y="6156007"/>
             <a:ext cx="6944702" cy="492443"/>
           </a:xfrm>
           <a:prstGeom prst="rect">
@@ -3970,9 +3841,9 @@
                   <a:srgbClr val="001D7A"/>
                 </a:solidFill>
                 <a:latin typeface="Calibri Bold" panose="020F0702030404030204" pitchFamily="34" charset="0"/>
-                <a:ea typeface="Touvlo Bold"/>
+                <a:ea typeface="Touvlo Bold" panose="020B0804030403020204"/>
                 <a:cs typeface="Calibri Bold" panose="020F0702030404030204" pitchFamily="34" charset="0"/>
-                <a:sym typeface="Touvlo Bold"/>
+                <a:sym typeface="Touvlo Bold" panose="020B0804030403020204"/>
               </a:rPr>
               <a:t>PHÂN TÍCH VÀ THIẾT KẾ HỆ THỐNG</a:t>
             </a:r>
@@ -3987,7 +3858,7 @@
         </p:nvSpPr>
         <p:spPr>
           <a:xfrm>
-            <a:off x="698500" y="12308563"/>
+            <a:off x="206890" y="12308563"/>
             <a:ext cx="4911210" cy="461665"/>
           </a:xfrm>
           <a:prstGeom prst="rect">
@@ -4002,7 +3873,7 @@
           <a:p>
             <a:pPr algn="l">
               <a:lnSpc>
-                <a:spcPts val="3591"/>
+                <a:spcPts val="3590"/>
               </a:lnSpc>
             </a:pPr>
             <a:r>
@@ -4011,9 +3882,9 @@
                   <a:srgbClr val="001D7A"/>
                 </a:solidFill>
                 <a:latin typeface="Calibri Bold" panose="020F0702030404030204" pitchFamily="34" charset="0"/>
-                <a:ea typeface="Touvlo Bold"/>
+                <a:ea typeface="Touvlo Bold" panose="020B0804030403020204"/>
                 <a:cs typeface="Calibri Bold" panose="020F0702030404030204" pitchFamily="34" charset="0"/>
-                <a:sym typeface="Touvlo Bold"/>
+                <a:sym typeface="Touvlo Bold" panose="020B0804030403020204"/>
               </a:rPr>
               <a:t>KẾT QUẢ ĐẠT ĐƯỢC</a:t>
             </a:r>
@@ -4028,7 +3899,7 @@
         </p:nvSpPr>
         <p:spPr>
           <a:xfrm>
-            <a:off x="698500" y="18607385"/>
+            <a:off x="129637" y="18607385"/>
             <a:ext cx="6349937" cy="461665"/>
           </a:xfrm>
           <a:prstGeom prst="rect">
@@ -4043,7 +3914,7 @@
           <a:p>
             <a:pPr algn="l">
               <a:lnSpc>
-                <a:spcPts val="3591"/>
+                <a:spcPts val="3590"/>
               </a:lnSpc>
             </a:pPr>
             <a:r>
@@ -4052,9 +3923,9 @@
                   <a:srgbClr val="001D7A"/>
                 </a:solidFill>
                 <a:latin typeface="Calibri Bold" panose="020F0702030404030204" pitchFamily="34" charset="0"/>
-                <a:ea typeface="Touvlo Bold"/>
+                <a:ea typeface="Touvlo Bold" panose="020B0804030403020204"/>
                 <a:cs typeface="Calibri Bold" panose="020F0702030404030204" pitchFamily="34" charset="0"/>
-                <a:sym typeface="Touvlo Bold"/>
+                <a:sym typeface="Touvlo Bold" panose="020B0804030403020204"/>
               </a:rPr>
               <a:t>HẠN CHẾ CỦA HỆ THỐNG</a:t>
             </a:r>
@@ -4069,7 +3940,7 @@
         </p:nvSpPr>
         <p:spPr>
           <a:xfrm>
-            <a:off x="8013700" y="16004505"/>
+            <a:off x="7825837" y="16004505"/>
             <a:ext cx="5293263" cy="397545"/>
           </a:xfrm>
           <a:prstGeom prst="rect">
@@ -4084,7 +3955,7 @@
           <a:p>
             <a:pPr algn="l">
               <a:lnSpc>
-                <a:spcPts val="3096"/>
+                <a:spcPts val="3095"/>
               </a:lnSpc>
             </a:pPr>
             <a:r>
@@ -4093,9 +3964,9 @@
                   <a:srgbClr val="001D7A"/>
                 </a:solidFill>
                 <a:latin typeface="Calibri Bold" panose="020F0702030404030204" pitchFamily="34" charset="0"/>
-                <a:ea typeface="Touvlo Bold"/>
+                <a:ea typeface="Touvlo Bold" panose="020B0804030403020204"/>
                 <a:cs typeface="Calibri Bold" panose="020F0702030404030204" pitchFamily="34" charset="0"/>
-                <a:sym typeface="Touvlo Bold"/>
+                <a:sym typeface="Touvlo Bold" panose="020B0804030403020204"/>
               </a:rPr>
               <a:t>CÔNG NGHỆ SỬ DỤNG</a:t>
             </a:r>
@@ -4110,8 +3981,8 @@
         </p:nvSpPr>
         <p:spPr>
           <a:xfrm>
-            <a:off x="535951" y="4184995"/>
-            <a:ext cx="6839853" cy="1785104"/>
+            <a:off x="-79704" y="4482586"/>
+            <a:ext cx="7543801" cy="1415772"/>
           </a:xfrm>
           <a:prstGeom prst="rect">
             <a:avLst/>
@@ -4123,8 +3994,8 @@
           </a:bodyPr>
           <a:lstStyle/>
           <a:p>
-            <a:pPr marL="401100" lvl="1" indent="-200550" algn="l">
-              <a:buFont typeface="Arial"/>
+            <a:pPr marL="401320" lvl="1" indent="-200660" algn="l">
+              <a:buFont typeface="Arial" panose="020B0604020202020204"/>
               <a:buChar char="•"/>
             </a:pPr>
             <a:r>
@@ -4133,16 +4004,16 @@
                   <a:srgbClr val="000000"/>
                 </a:solidFill>
                 <a:latin typeface="Arial" panose="020B0604020202020204" pitchFamily="34" charset="0"/>
-                <a:ea typeface="Touvlo"/>
+                <a:ea typeface="Touvlo" panose="020B0604030403020204"/>
                 <a:cs typeface="Arial" panose="020B0604020202020204" pitchFamily="34" charset="0"/>
-                <a:sym typeface="Touvlo"/>
+                <a:sym typeface="Touvlo" panose="020B0604030403020204"/>
               </a:rPr>
               <a:t>Quản lý thư viện thủ công còn nhiều hạn chế.</a:t>
             </a:r>
           </a:p>
           <a:p>
-            <a:pPr marL="401100" lvl="1" indent="-200550" algn="l">
-              <a:buFont typeface="Arial"/>
+            <a:pPr marL="401320" lvl="1" indent="-200660" algn="l">
+              <a:buFont typeface="Arial" panose="020B0604020202020204"/>
               <a:buChar char="•"/>
             </a:pPr>
             <a:r>
@@ -4151,16 +4022,16 @@
                   <a:srgbClr val="000000"/>
                 </a:solidFill>
                 <a:latin typeface="Arial" panose="020B0604020202020204" pitchFamily="34" charset="0"/>
-                <a:ea typeface="Touvlo"/>
+                <a:ea typeface="Touvlo" panose="020B0604030403020204"/>
                 <a:cs typeface="Arial" panose="020B0604020202020204" pitchFamily="34" charset="0"/>
-                <a:sym typeface="Touvlo"/>
+                <a:sym typeface="Touvlo" panose="020B0604030403020204"/>
               </a:rPr>
               <a:t>Khó tra cứu, dễ sai sót dữ liệu.</a:t>
             </a:r>
           </a:p>
           <a:p>
-            <a:pPr marL="401100" lvl="1" indent="-200550" algn="l">
-              <a:buFont typeface="Arial"/>
+            <a:pPr marL="401320" lvl="1" indent="-200660" algn="l">
+              <a:buFont typeface="Arial" panose="020B0604020202020204"/>
               <a:buChar char="•"/>
             </a:pPr>
             <a:r>
@@ -4169,9 +4040,9 @@
                   <a:srgbClr val="000000"/>
                 </a:solidFill>
                 <a:latin typeface="Arial" panose="020B0604020202020204" pitchFamily="34" charset="0"/>
-                <a:ea typeface="Touvlo"/>
+                <a:ea typeface="Touvlo" panose="020B0604030403020204"/>
                 <a:cs typeface="Arial" panose="020B0604020202020204" pitchFamily="34" charset="0"/>
-                <a:sym typeface="Touvlo"/>
+                <a:sym typeface="Touvlo" panose="020B0604030403020204"/>
               </a:rPr>
               <a:t>Ứng dụng CNTT giúp tự động hóa quản lý thư viện.</a:t>
             </a:r>
@@ -4182,10 +4053,10 @@
               <a:solidFill>
                 <a:srgbClr val="000000"/>
               </a:solidFill>
-              <a:latin typeface="Touvlo"/>
-              <a:ea typeface="Touvlo"/>
-              <a:cs typeface="Touvlo"/>
-              <a:sym typeface="Touvlo"/>
+              <a:latin typeface="Touvlo" panose="020B0604030403020204"/>
+              <a:ea typeface="Touvlo" panose="020B0604030403020204"/>
+              <a:cs typeface="Touvlo" panose="020B0604030403020204"/>
+              <a:sym typeface="Touvlo" panose="020B0604030403020204"/>
             </a:endParaRPr>
           </a:p>
         </p:txBody>
@@ -4198,7 +4069,7 @@
         </p:nvSpPr>
         <p:spPr>
           <a:xfrm>
-            <a:off x="7861300" y="4256722"/>
+            <a:off x="7556499" y="4193276"/>
             <a:ext cx="4197247" cy="1477328"/>
           </a:xfrm>
           <a:prstGeom prst="rect">
@@ -4211,8 +4082,8 @@
           </a:bodyPr>
           <a:lstStyle/>
           <a:p>
-            <a:pPr marL="401100" lvl="1" indent="-200550" algn="l">
-              <a:buFont typeface="Arial"/>
+            <a:pPr marL="401320" lvl="1" indent="-200660" algn="l">
+              <a:buFont typeface="Arial" panose="020B0604020202020204"/>
               <a:buChar char="•"/>
             </a:pPr>
             <a:r>
@@ -4221,16 +4092,16 @@
                   <a:srgbClr val="000000"/>
                 </a:solidFill>
                 <a:latin typeface="Arial" panose="020B0604020202020204" pitchFamily="34" charset="0"/>
-                <a:ea typeface="Touvlo"/>
+                <a:ea typeface="Touvlo" panose="020B0604030403020204"/>
                 <a:cs typeface="Arial" panose="020B0604020202020204" pitchFamily="34" charset="0"/>
-                <a:sym typeface="Touvlo"/>
+                <a:sym typeface="Touvlo" panose="020B0604030403020204"/>
               </a:rPr>
               <a:t>Quản lý thông tin sách</a:t>
             </a:r>
           </a:p>
           <a:p>
-            <a:pPr marL="401100" lvl="1" indent="-200550" algn="l">
-              <a:buFont typeface="Arial"/>
+            <a:pPr marL="401320" lvl="1" indent="-200660" algn="l">
+              <a:buFont typeface="Arial" panose="020B0604020202020204"/>
               <a:buChar char="•"/>
             </a:pPr>
             <a:r>
@@ -4239,16 +4110,16 @@
                   <a:srgbClr val="000000"/>
                 </a:solidFill>
                 <a:latin typeface="Arial" panose="020B0604020202020204" pitchFamily="34" charset="0"/>
-                <a:ea typeface="Touvlo"/>
+                <a:ea typeface="Touvlo" panose="020B0604030403020204"/>
                 <a:cs typeface="Arial" panose="020B0604020202020204" pitchFamily="34" charset="0"/>
-                <a:sym typeface="Touvlo"/>
+                <a:sym typeface="Touvlo" panose="020B0604030403020204"/>
               </a:rPr>
               <a:t>Quản lý độc giả</a:t>
             </a:r>
           </a:p>
           <a:p>
-            <a:pPr marL="401100" lvl="1" indent="-200550" algn="l">
-              <a:buFont typeface="Arial"/>
+            <a:pPr marL="401320" lvl="1" indent="-200660" algn="l">
+              <a:buFont typeface="Arial" panose="020B0604020202020204"/>
               <a:buChar char="•"/>
             </a:pPr>
             <a:r>
@@ -4257,16 +4128,16 @@
                   <a:srgbClr val="000000"/>
                 </a:solidFill>
                 <a:latin typeface="Arial" panose="020B0604020202020204" pitchFamily="34" charset="0"/>
-                <a:ea typeface="Touvlo"/>
+                <a:ea typeface="Touvlo" panose="020B0604030403020204"/>
                 <a:cs typeface="Arial" panose="020B0604020202020204" pitchFamily="34" charset="0"/>
-                <a:sym typeface="Touvlo"/>
+                <a:sym typeface="Touvlo" panose="020B0604030403020204"/>
               </a:rPr>
               <a:t>Quản lý mượn – trả sách</a:t>
             </a:r>
           </a:p>
           <a:p>
-            <a:pPr marL="401100" lvl="1" indent="-200550" algn="l">
-              <a:buFont typeface="Arial"/>
+            <a:pPr marL="401320" lvl="1" indent="-200660" algn="l">
+              <a:buFont typeface="Arial" panose="020B0604020202020204"/>
               <a:buChar char="•"/>
             </a:pPr>
             <a:r>
@@ -4275,9 +4146,9 @@
                   <a:srgbClr val="000000"/>
                 </a:solidFill>
                 <a:latin typeface="Arial" panose="020B0604020202020204" pitchFamily="34" charset="0"/>
-                <a:ea typeface="Touvlo"/>
+                <a:ea typeface="Touvlo" panose="020B0604030403020204"/>
                 <a:cs typeface="Arial" panose="020B0604020202020204" pitchFamily="34" charset="0"/>
-                <a:sym typeface="Touvlo"/>
+                <a:sym typeface="Touvlo" panose="020B0604030403020204"/>
               </a:rPr>
               <a:t>Thống kê và báo cáo</a:t>
             </a:r>
@@ -4292,7 +4163,7 @@
         </p:nvSpPr>
         <p:spPr>
           <a:xfrm>
-            <a:off x="622300" y="6713994"/>
+            <a:off x="217921" y="6601733"/>
             <a:ext cx="6753504" cy="2677656"/>
           </a:xfrm>
           <a:prstGeom prst="rect">
@@ -4318,9 +4189,9 @@
                   <a:srgbClr val="000000"/>
                 </a:solidFill>
                 <a:latin typeface="Arial" panose="020B0604020202020204" pitchFamily="34" charset="0"/>
-                <a:ea typeface="Touvlo"/>
+                <a:ea typeface="Touvlo" panose="020B0604030403020204"/>
                 <a:cs typeface="Arial" panose="020B0604020202020204" pitchFamily="34" charset="0"/>
-                <a:sym typeface="Touvlo"/>
+                <a:sym typeface="Touvlo" panose="020B0604030403020204"/>
               </a:rPr>
               <a:t>Phân tích yêu cầu người dùng (Admin).</a:t>
             </a:r>
@@ -4339,9 +4210,9 @@
                   <a:srgbClr val="000000"/>
                 </a:solidFill>
                 <a:latin typeface="Arial" panose="020B0604020202020204" pitchFamily="34" charset="0"/>
-                <a:ea typeface="Touvlo"/>
+                <a:ea typeface="Touvlo" panose="020B0604030403020204"/>
                 <a:cs typeface="Arial" panose="020B0604020202020204" pitchFamily="34" charset="0"/>
-                <a:sym typeface="Touvlo"/>
+                <a:sym typeface="Touvlo" panose="020B0604030403020204"/>
               </a:rPr>
               <a:t>Thiết kế sơ đồ Use Case mô tả các chức năng hệ thống.</a:t>
             </a:r>
@@ -4360,9 +4231,9 @@
                   <a:srgbClr val="000000"/>
                 </a:solidFill>
                 <a:latin typeface="Arial" panose="020B0604020202020204" pitchFamily="34" charset="0"/>
-                <a:ea typeface="Touvlo"/>
+                <a:ea typeface="Touvlo" panose="020B0604030403020204"/>
                 <a:cs typeface="Arial" panose="020B0604020202020204" pitchFamily="34" charset="0"/>
-                <a:sym typeface="Touvlo"/>
+                <a:sym typeface="Touvlo" panose="020B0604030403020204"/>
               </a:rPr>
               <a:t>Thiết kế cơ sở dữ liệu bằng sơ đồ ERD.</a:t>
             </a:r>
@@ -4379,10 +4250,10 @@
               <a:solidFill>
                 <a:srgbClr val="000000"/>
               </a:solidFill>
-              <a:latin typeface="Touvlo"/>
-              <a:ea typeface="Touvlo"/>
-              <a:cs typeface="Touvlo"/>
-              <a:sym typeface="Touvlo"/>
+              <a:latin typeface="Touvlo" panose="020B0604030403020204"/>
+              <a:ea typeface="Touvlo" panose="020B0604030403020204"/>
+              <a:cs typeface="Touvlo" panose="020B0604030403020204"/>
+              <a:sym typeface="Touvlo" panose="020B0604030403020204"/>
             </a:endParaRPr>
           </a:p>
         </p:txBody>
@@ -4395,7 +4266,7 @@
         </p:nvSpPr>
         <p:spPr>
           <a:xfrm>
-            <a:off x="686698" y="12930988"/>
+            <a:off x="165100" y="12930988"/>
             <a:ext cx="6361739" cy="2215991"/>
           </a:xfrm>
           <a:prstGeom prst="rect">
@@ -4418,9 +4289,9 @@
                   <a:srgbClr val="000000"/>
                 </a:solidFill>
                 <a:latin typeface="Arial" panose="020B0604020202020204" pitchFamily="34" charset="0"/>
-                <a:ea typeface="Touvlo"/>
+                <a:ea typeface="Touvlo" panose="020B0604030403020204"/>
                 <a:cs typeface="Arial" panose="020B0604020202020204" pitchFamily="34" charset="0"/>
-                <a:sym typeface="Touvlo"/>
+                <a:sym typeface="Touvlo" panose="020B0604030403020204"/>
               </a:rPr>
               <a:t>Xây dựng thành công website quản lý thư viện.</a:t>
             </a:r>
@@ -4436,9 +4307,9 @@
                   <a:srgbClr val="000000"/>
                 </a:solidFill>
                 <a:latin typeface="Arial" panose="020B0604020202020204" pitchFamily="34" charset="0"/>
-                <a:ea typeface="Touvlo"/>
+                <a:ea typeface="Touvlo" panose="020B0604030403020204"/>
                 <a:cs typeface="Arial" panose="020B0604020202020204" pitchFamily="34" charset="0"/>
-                <a:sym typeface="Touvlo"/>
+                <a:sym typeface="Touvlo" panose="020B0604030403020204"/>
               </a:rPr>
               <a:t>Giao diện thân thiện, dễ sử dụng.</a:t>
             </a:r>
@@ -4454,9 +4325,9 @@
                   <a:srgbClr val="000000"/>
                 </a:solidFill>
                 <a:latin typeface="Arial" panose="020B0604020202020204" pitchFamily="34" charset="0"/>
-                <a:ea typeface="Touvlo"/>
+                <a:ea typeface="Touvlo" panose="020B0604030403020204"/>
                 <a:cs typeface="Arial" panose="020B0604020202020204" pitchFamily="34" charset="0"/>
-                <a:sym typeface="Touvlo"/>
+                <a:sym typeface="Touvlo" panose="020B0604030403020204"/>
               </a:rPr>
               <a:t>Hệ thống hỗ trợ quản lý hiệu quả hơn so với phương pháp thủ công.</a:t>
             </a:r>
@@ -4468,9 +4339,9 @@
                 <a:srgbClr val="000000"/>
               </a:solidFill>
               <a:latin typeface="Arial" panose="020B0604020202020204" pitchFamily="34" charset="0"/>
-              <a:ea typeface="Touvlo"/>
+              <a:ea typeface="Touvlo" panose="020B0604030403020204"/>
               <a:cs typeface="Arial" panose="020B0604020202020204" pitchFamily="34" charset="0"/>
-              <a:sym typeface="Touvlo"/>
+              <a:sym typeface="Touvlo" panose="020B0604030403020204"/>
             </a:endParaRPr>
           </a:p>
         </p:txBody>
@@ -4496,8 +4367,8 @@
           </a:bodyPr>
           <a:lstStyle/>
           <a:p>
-            <a:pPr marL="357208" lvl="1" indent="-178604" algn="l">
-              <a:buFont typeface="Arial"/>
+            <a:pPr marL="357505" lvl="1" indent="-178435" algn="l">
+              <a:buFont typeface="Arial" panose="020B0604020202020204"/>
               <a:buChar char="•"/>
             </a:pPr>
             <a:r>
@@ -4506,16 +4377,16 @@
                   <a:srgbClr val="000000"/>
                 </a:solidFill>
                 <a:latin typeface="Arial" panose="020B0604020202020204" pitchFamily="34" charset="0"/>
-                <a:ea typeface="Touvlo"/>
+                <a:ea typeface="Touvlo" panose="020B0604030403020204"/>
                 <a:cs typeface="Arial" panose="020B0604020202020204" pitchFamily="34" charset="0"/>
-                <a:sym typeface="Touvlo"/>
+                <a:sym typeface="Touvlo" panose="020B0604030403020204"/>
               </a:rPr>
               <a:t>Thiết kế giao diện, màu sắc vẫn chưa được chuyên nghiệp. </a:t>
             </a:r>
           </a:p>
           <a:p>
-            <a:pPr marL="357208" lvl="1" indent="-178604" algn="l">
-              <a:buFont typeface="Arial"/>
+            <a:pPr marL="357505" lvl="1" indent="-178435" algn="l">
+              <a:buFont typeface="Arial" panose="020B0604020202020204"/>
               <a:buChar char="•"/>
             </a:pPr>
             <a:r>
@@ -4524,16 +4395,16 @@
                   <a:srgbClr val="000000"/>
                 </a:solidFill>
                 <a:latin typeface="Arial" panose="020B0604020202020204" pitchFamily="34" charset="0"/>
-                <a:ea typeface="Touvlo"/>
+                <a:ea typeface="Touvlo" panose="020B0604030403020204"/>
                 <a:cs typeface="Arial" panose="020B0604020202020204" pitchFamily="34" charset="0"/>
-                <a:sym typeface="Touvlo"/>
+                <a:sym typeface="Touvlo" panose="020B0604030403020204"/>
               </a:rPr>
               <a:t>Chưa tích hợp công nghệ nâng cao (QR code, RFID).</a:t>
             </a:r>
           </a:p>
           <a:p>
-            <a:pPr marL="357208" lvl="1" indent="-178604" algn="l">
-              <a:buFont typeface="Arial"/>
+            <a:pPr marL="357505" lvl="1" indent="-178435" algn="l">
+              <a:buFont typeface="Arial" panose="020B0604020202020204"/>
               <a:buChar char="•"/>
             </a:pPr>
             <a:r>
@@ -4542,23 +4413,23 @@
                   <a:srgbClr val="000000"/>
                 </a:solidFill>
                 <a:latin typeface="Arial" panose="020B0604020202020204" pitchFamily="34" charset="0"/>
-                <a:ea typeface="Touvlo"/>
+                <a:ea typeface="Touvlo" panose="020B0604030403020204"/>
                 <a:cs typeface="Arial" panose="020B0604020202020204" pitchFamily="34" charset="0"/>
-                <a:sym typeface="Touvlo"/>
+                <a:sym typeface="Touvlo" panose="020B0604030403020204"/>
               </a:rPr>
               <a:t>Chưa hỗ trợ quản lý nhiều thư viện.</a:t>
             </a:r>
           </a:p>
           <a:p>
             <a:pPr algn="l"/>
-            <a:endParaRPr lang="en-US" sz="1654">
+            <a:endParaRPr lang="en-US" sz="1655">
               <a:solidFill>
                 <a:srgbClr val="000000"/>
               </a:solidFill>
-              <a:latin typeface="Touvlo"/>
-              <a:ea typeface="Touvlo"/>
-              <a:cs typeface="Touvlo"/>
-              <a:sym typeface="Touvlo"/>
+              <a:latin typeface="Touvlo" panose="020B0604030403020204"/>
+              <a:ea typeface="Touvlo" panose="020B0604030403020204"/>
+              <a:cs typeface="Touvlo" panose="020B0604030403020204"/>
+              <a:sym typeface="Touvlo" panose="020B0604030403020204"/>
             </a:endParaRPr>
           </a:p>
         </p:txBody>
@@ -4584,8 +4455,8 @@
           </a:bodyPr>
           <a:lstStyle/>
           <a:p>
-            <a:pPr marL="359791" lvl="1" indent="-179895" algn="l">
-              <a:buFont typeface="Arial"/>
+            <a:pPr marL="360045" lvl="1" indent="-179705" algn="l">
+              <a:buFont typeface="Arial" panose="020B0604020202020204"/>
               <a:buChar char="•"/>
             </a:pPr>
             <a:r>
@@ -4594,16 +4465,16 @@
                   <a:srgbClr val="000000"/>
                 </a:solidFill>
                 <a:latin typeface="Arial" panose="020B0604020202020204" pitchFamily="34" charset="0"/>
-                <a:ea typeface="Touvlo"/>
+                <a:ea typeface="Touvlo" panose="020B0604030403020204"/>
                 <a:cs typeface="Arial" panose="020B0604020202020204" pitchFamily="34" charset="0"/>
-                <a:sym typeface="Touvlo"/>
+                <a:sym typeface="Touvlo" panose="020B0604030403020204"/>
               </a:rPr>
               <a:t>Ngôn ngữ: PHP, HTML, CSS, JavaScript</a:t>
             </a:r>
           </a:p>
           <a:p>
-            <a:pPr marL="359791" lvl="1" indent="-179895" algn="l">
-              <a:buFont typeface="Arial"/>
+            <a:pPr marL="360045" lvl="1" indent="-179705" algn="l">
+              <a:buFont typeface="Arial" panose="020B0604020202020204"/>
               <a:buChar char="•"/>
             </a:pPr>
             <a:r>
@@ -4612,16 +4483,16 @@
                   <a:srgbClr val="000000"/>
                 </a:solidFill>
                 <a:latin typeface="Arial" panose="020B0604020202020204" pitchFamily="34" charset="0"/>
-                <a:ea typeface="Touvlo"/>
+                <a:ea typeface="Touvlo" panose="020B0604030403020204"/>
                 <a:cs typeface="Arial" panose="020B0604020202020204" pitchFamily="34" charset="0"/>
-                <a:sym typeface="Touvlo"/>
+                <a:sym typeface="Touvlo" panose="020B0604030403020204"/>
               </a:rPr>
               <a:t>Cơ sở dữ liệu: MySQL</a:t>
             </a:r>
           </a:p>
           <a:p>
-            <a:pPr marL="359791" lvl="1" indent="-179895" algn="l">
-              <a:buFont typeface="Arial"/>
+            <a:pPr marL="360045" lvl="1" indent="-179705" algn="l">
+              <a:buFont typeface="Arial" panose="020B0604020202020204"/>
               <a:buChar char="•"/>
             </a:pPr>
             <a:r>
@@ -4630,16 +4501,16 @@
                   <a:srgbClr val="000000"/>
                 </a:solidFill>
                 <a:latin typeface="Arial" panose="020B0604020202020204" pitchFamily="34" charset="0"/>
-                <a:ea typeface="Touvlo"/>
+                <a:ea typeface="Touvlo" panose="020B0604030403020204"/>
                 <a:cs typeface="Arial" panose="020B0604020202020204" pitchFamily="34" charset="0"/>
-                <a:sym typeface="Touvlo"/>
+                <a:sym typeface="Touvlo" panose="020B0604030403020204"/>
               </a:rPr>
               <a:t>Giao diện: Bootstrap / AdminLTE</a:t>
             </a:r>
           </a:p>
           <a:p>
-            <a:pPr marL="359791" lvl="1" indent="-179895" algn="l">
-              <a:buFont typeface="Arial"/>
+            <a:pPr marL="360045" lvl="1" indent="-179705" algn="l">
+              <a:buFont typeface="Arial" panose="020B0604020202020204"/>
               <a:buChar char="•"/>
             </a:pPr>
             <a:r>
@@ -4648,9 +4519,9 @@
                   <a:srgbClr val="000000"/>
                 </a:solidFill>
                 <a:latin typeface="Arial" panose="020B0604020202020204" pitchFamily="34" charset="0"/>
-                <a:ea typeface="Touvlo"/>
+                <a:ea typeface="Touvlo" panose="020B0604030403020204"/>
                 <a:cs typeface="Arial" panose="020B0604020202020204" pitchFamily="34" charset="0"/>
-                <a:sym typeface="Touvlo"/>
+                <a:sym typeface="Touvlo" panose="020B0604030403020204"/>
               </a:rPr>
               <a:t>Môi trường: Laragon</a:t>
             </a:r>
@@ -4665,7 +4536,7 @@
         </p:nvSpPr>
         <p:spPr>
           <a:xfrm>
-            <a:off x="7994942" y="3610919"/>
+            <a:off x="7690142" y="3610919"/>
             <a:ext cx="4285958" cy="538609"/>
           </a:xfrm>
           <a:prstGeom prst="rect">
@@ -4680,7 +4551,7 @@
           <a:p>
             <a:pPr>
               <a:lnSpc>
-                <a:spcPts val="4199"/>
+                <a:spcPts val="4200"/>
               </a:lnSpc>
               <a:spcBef>
                 <a:spcPct val="0"/>
@@ -4692,9 +4563,9 @@
                   <a:srgbClr val="001D7A"/>
                 </a:solidFill>
                 <a:latin typeface="Calibri Bold" panose="020F0702030404030204" pitchFamily="34" charset="0"/>
-                <a:ea typeface="Touvlo Bold"/>
+                <a:ea typeface="Touvlo Bold" panose="020B0804030403020204"/>
                 <a:cs typeface="Calibri Bold" panose="020F0702030404030204" pitchFamily="34" charset="0"/>
-                <a:sym typeface="Touvlo Bold"/>
+                <a:sym typeface="Touvlo Bold" panose="020B0804030403020204"/>
               </a:rPr>
               <a:t>CHỨC NĂNG CHÍNH</a:t>
             </a:r>
@@ -4709,8 +4580,8 @@
         </p:nvGrpSpPr>
         <p:grpSpPr>
           <a:xfrm>
-            <a:off x="7890421" y="10306050"/>
-            <a:ext cx="6676478" cy="2261262"/>
+            <a:off x="7660058" y="10113436"/>
+            <a:ext cx="7364042" cy="2375873"/>
             <a:chOff x="0" y="0"/>
             <a:chExt cx="1170533" cy="465858"/>
           </a:xfrm>
@@ -4755,14 +4626,11 @@
                 <a:lumMod val="95000"/>
               </a:schemeClr>
             </a:solidFill>
-            <a:ln w="19050" cap="sq">
+            <a:ln w="28575" cap="sq" cmpd="sng">
               <a:solidFill>
-                <a:schemeClr val="accent1">
-                  <a:lumMod val="60000"/>
-                  <a:lumOff val="40000"/>
-                </a:schemeClr>
+                <a:schemeClr val="tx1"/>
               </a:solidFill>
-              <a:prstDash val="solid"/>
+              <a:prstDash val="lgDashDot"/>
               <a:miter/>
             </a:ln>
           </p:spPr>
@@ -4781,6 +4649,18 @@
             <a:prstGeom prst="rect">
               <a:avLst/>
             </a:prstGeom>
+            <a:solidFill>
+              <a:schemeClr val="bg1">
+                <a:lumMod val="95000"/>
+              </a:schemeClr>
+            </a:solidFill>
+            <a:ln w="28575" cap="sq" cmpd="sng">
+              <a:solidFill>
+                <a:schemeClr val="tx1"/>
+              </a:solidFill>
+              <a:prstDash val="lgDashDot"/>
+              <a:miter/>
+            </a:ln>
           </p:spPr>
           <p:txBody>
             <a:bodyPr lIns="44941" tIns="44941" rIns="44941" bIns="44941" rtlCol="0" anchor="ctr"/>
@@ -4788,7 +4668,7 @@
             <a:p>
               <a:pPr algn="ctr">
                 <a:lnSpc>
-                  <a:spcPts val="3839"/>
+                  <a:spcPts val="3840"/>
                 </a:lnSpc>
                 <a:spcBef>
                   <a:spcPct val="0"/>
@@ -4807,7 +4687,7 @@
         </p:nvSpPr>
         <p:spPr>
           <a:xfrm>
-            <a:off x="8006091" y="10334834"/>
+            <a:off x="7842542" y="10001250"/>
             <a:ext cx="4285958" cy="538609"/>
           </a:xfrm>
           <a:prstGeom prst="rect">
@@ -4822,7 +4702,7 @@
           <a:p>
             <a:pPr>
               <a:lnSpc>
-                <a:spcPts val="4199"/>
+                <a:spcPts val="4200"/>
               </a:lnSpc>
               <a:spcBef>
                 <a:spcPct val="0"/>
@@ -4834,9 +4714,9 @@
                   <a:srgbClr val="001D7A"/>
                 </a:solidFill>
                 <a:latin typeface="Calibri Bold" panose="020F0702030404030204" pitchFamily="34" charset="0"/>
-                <a:ea typeface="Touvlo Bold"/>
+                <a:ea typeface="Touvlo Bold" panose="020B0804030403020204"/>
                 <a:cs typeface="Calibri Bold" panose="020F0702030404030204" pitchFamily="34" charset="0"/>
-                <a:sym typeface="Touvlo Bold"/>
+                <a:sym typeface="Touvlo Bold" panose="020B0804030403020204"/>
               </a:rPr>
               <a:t>MỤC TIÊU ĐỀ TÀI</a:t>
             </a:r>
@@ -4851,7 +4731,7 @@
         </p:nvSpPr>
         <p:spPr>
           <a:xfrm>
-            <a:off x="7887273" y="10869456"/>
+            <a:off x="7632700" y="10534650"/>
             <a:ext cx="4115253" cy="0"/>
           </a:xfrm>
           <a:prstGeom prst="line">
@@ -4875,7 +4755,7 @@
         </p:nvSpPr>
         <p:spPr>
           <a:xfrm>
-            <a:off x="7815126" y="10832528"/>
+            <a:off x="7556500" y="10610850"/>
             <a:ext cx="5716505" cy="2147511"/>
           </a:xfrm>
           <a:prstGeom prst="rect">
@@ -4888,11 +4768,11 @@
           </a:bodyPr>
           <a:lstStyle/>
           <a:p>
-            <a:pPr marL="401100" lvl="1" indent="-200550" algn="l">
+            <a:pPr marL="401320" lvl="1" indent="-200660" algn="l">
               <a:lnSpc>
                 <a:spcPct val="150000"/>
               </a:lnSpc>
-              <a:buFont typeface="Arial"/>
+              <a:buFont typeface="Arial" panose="020B0604020202020204"/>
               <a:buChar char="•"/>
             </a:pPr>
             <a:r>
@@ -4901,19 +4781,19 @@
                   <a:srgbClr val="000000"/>
                 </a:solidFill>
                 <a:latin typeface="Arial" panose="020B0604020202020204" pitchFamily="34" charset="0"/>
-                <a:ea typeface="Touvlo"/>
+                <a:ea typeface="Touvlo" panose="020B0604030403020204"/>
                 <a:cs typeface="Arial" panose="020B0604020202020204" pitchFamily="34" charset="0"/>
-                <a:sym typeface="Touvlo"/>
+                <a:sym typeface="Touvlo" panose="020B0604030403020204"/>
               </a:rPr>
               <a:t>Xây dựng website quản lý thư viện.</a:t>
             </a:r>
           </a:p>
           <a:p>
-            <a:pPr marL="401100" lvl="1" indent="-200550" algn="l">
+            <a:pPr marL="401320" lvl="1" indent="-200660" algn="l">
               <a:lnSpc>
                 <a:spcPct val="150000"/>
               </a:lnSpc>
-              <a:buFont typeface="Arial"/>
+              <a:buFont typeface="Arial" panose="020B0604020202020204"/>
               <a:buChar char="•"/>
             </a:pPr>
             <a:r>
@@ -4922,19 +4802,19 @@
                   <a:srgbClr val="000000"/>
                 </a:solidFill>
                 <a:latin typeface="Arial" panose="020B0604020202020204" pitchFamily="34" charset="0"/>
-                <a:ea typeface="Touvlo"/>
+                <a:ea typeface="Touvlo" panose="020B0604030403020204"/>
                 <a:cs typeface="Arial" panose="020B0604020202020204" pitchFamily="34" charset="0"/>
-                <a:sym typeface="Touvlo"/>
+                <a:sym typeface="Touvlo" panose="020B0604030403020204"/>
               </a:rPr>
               <a:t>Quản lý sách, độc giả, mượn – trả.</a:t>
             </a:r>
           </a:p>
           <a:p>
-            <a:pPr marL="401100" lvl="1" indent="-200550" algn="l">
+            <a:pPr marL="401320" lvl="1" indent="-200660" algn="l">
               <a:lnSpc>
                 <a:spcPct val="150000"/>
               </a:lnSpc>
-              <a:buFont typeface="Arial"/>
+              <a:buFont typeface="Arial" panose="020B0604020202020204"/>
               <a:buChar char="•"/>
             </a:pPr>
             <a:r>
@@ -4943,9 +4823,9 @@
                   <a:srgbClr val="000000"/>
                 </a:solidFill>
                 <a:latin typeface="Arial" panose="020B0604020202020204" pitchFamily="34" charset="0"/>
-                <a:ea typeface="Touvlo"/>
+                <a:ea typeface="Touvlo" panose="020B0604030403020204"/>
                 <a:cs typeface="Arial" panose="020B0604020202020204" pitchFamily="34" charset="0"/>
-                <a:sym typeface="Touvlo"/>
+                <a:sym typeface="Touvlo" panose="020B0604030403020204"/>
               </a:rPr>
               <a:t>Giao diện thân thiện, dễ sử dụng.</a:t>
             </a:r>
@@ -4961,9 +4841,9 @@
                 <a:srgbClr val="000000"/>
               </a:solidFill>
               <a:latin typeface="Arial" panose="020B0604020202020204" pitchFamily="34" charset="0"/>
-              <a:ea typeface="Touvlo"/>
+              <a:ea typeface="Touvlo" panose="020B0604030403020204"/>
               <a:cs typeface="Arial" panose="020B0604020202020204" pitchFamily="34" charset="0"/>
-              <a:sym typeface="Touvlo"/>
+              <a:sym typeface="Touvlo" panose="020B0604030403020204"/>
             </a:endParaRPr>
           </a:p>
         </p:txBody>
@@ -4976,7 +4856,7 @@
         </p:nvSpPr>
         <p:spPr>
           <a:xfrm>
-            <a:off x="7982852" y="16402050"/>
+            <a:off x="7666903" y="16402050"/>
             <a:ext cx="4309197" cy="0"/>
           </a:xfrm>
           <a:prstGeom prst="line">
@@ -4994,8 +4874,10 @@
       </p:sp>
       <p:pic>
         <p:nvPicPr>
-          <p:cNvPr id="58" name="Picture 57"/>
-          <p:cNvPicPr/>
+          <p:cNvPr id="59" name="Picture 58"/>
+          <p:cNvPicPr>
+            <a:picLocks noChangeAspect="1"/>
+          </p:cNvPicPr>
           <p:nvPr/>
         </p:nvPicPr>
         <p:blipFill>
@@ -5006,44 +4888,24 @@
         </p:blipFill>
         <p:spPr>
           <a:xfrm>
-            <a:off x="7887786" y="6038850"/>
-            <a:ext cx="6679113" cy="4070309"/>
+            <a:off x="7745935" y="18500679"/>
+            <a:ext cx="7278165" cy="2695232"/>
           </a:xfrm>
           <a:prstGeom prst="rect">
             <a:avLst/>
           </a:prstGeom>
-          <a:ln>
+          <a:solidFill>
+            <a:schemeClr val="bg1">
+              <a:lumMod val="95000"/>
+            </a:schemeClr>
+          </a:solidFill>
+          <a:ln w="28575" cap="sq" cmpd="sng">
             <a:solidFill>
-              <a:schemeClr val="accent1">
-                <a:lumMod val="60000"/>
-                <a:lumOff val="40000"/>
-              </a:schemeClr>
+              <a:schemeClr val="tx1"/>
             </a:solidFill>
+            <a:prstDash val="lgDashDot"/>
+            <a:miter/>
           </a:ln>
-        </p:spPr>
-      </p:pic>
-      <p:pic>
-        <p:nvPicPr>
-          <p:cNvPr id="59" name="Picture 58"/>
-          <p:cNvPicPr>
-            <a:picLocks noChangeAspect="1"/>
-          </p:cNvPicPr>
-          <p:nvPr/>
-        </p:nvPicPr>
-        <p:blipFill>
-          <a:blip r:embed="rId3"/>
-          <a:stretch>
-            <a:fillRect/>
-          </a:stretch>
-        </p:blipFill>
-        <p:spPr>
-          <a:xfrm>
-            <a:off x="7982852" y="18675017"/>
-            <a:ext cx="6584046" cy="2364925"/>
-          </a:xfrm>
-          <a:prstGeom prst="rect">
-            <a:avLst/>
-          </a:prstGeom>
         </p:spPr>
       </p:pic>
       <p:pic>
@@ -5053,7 +4915,7 @@
           <p:nvPr/>
         </p:nvPicPr>
         <p:blipFill>
-          <a:blip r:embed="rId4" cstate="print">
+          <a:blip r:embed="rId3" cstate="print">
             <a:extLst>
               <a:ext uri="{28A0092B-C50C-407E-A947-70E740481C1C}">
                 <a14:useLocalDpi xmlns:a14="http://schemas.microsoft.com/office/drawing/2010/main" val="0"/>
@@ -5067,15 +4929,23 @@
         </p:blipFill>
         <p:spPr bwMode="auto">
           <a:xfrm>
-            <a:off x="622300" y="15130195"/>
-            <a:ext cx="7006699" cy="3176855"/>
+            <a:off x="53436" y="15022221"/>
+            <a:ext cx="7438537" cy="3284829"/>
           </a:xfrm>
           <a:prstGeom prst="rect">
             <a:avLst/>
           </a:prstGeom>
-          <a:noFill/>
-          <a:ln>
-            <a:noFill/>
+          <a:solidFill>
+            <a:schemeClr val="bg1">
+              <a:lumMod val="95000"/>
+            </a:schemeClr>
+          </a:solidFill>
+          <a:ln w="28575" cap="sq" cmpd="sng">
+            <a:solidFill>
+              <a:schemeClr val="tx1"/>
+            </a:solidFill>
+            <a:prstDash val="lgDashDot"/>
+            <a:miter/>
           </a:ln>
         </p:spPr>
       </p:pic>
@@ -5086,6 +4956,91 @@
           <p:nvPr/>
         </p:nvPicPr>
         <p:blipFill>
+          <a:blip r:embed="rId4"/>
+          <a:stretch>
+            <a:fillRect/>
+          </a:stretch>
+        </p:blipFill>
+        <p:spPr>
+          <a:xfrm>
+            <a:off x="24372" y="9054988"/>
+            <a:ext cx="7439725" cy="2962338"/>
+          </a:xfrm>
+          <a:prstGeom prst="rect">
+            <a:avLst/>
+          </a:prstGeom>
+          <a:solidFill>
+            <a:schemeClr val="bg1">
+              <a:lumMod val="95000"/>
+            </a:schemeClr>
+          </a:solidFill>
+          <a:ln w="28575" cap="sq" cmpd="sng">
+            <a:solidFill>
+              <a:schemeClr val="tx1"/>
+            </a:solidFill>
+            <a:prstDash val="lgDashDot"/>
+            <a:miter/>
+          </a:ln>
+        </p:spPr>
+      </p:pic>
+      <p:sp>
+        <p:nvSpPr>
+          <p:cNvPr id="60" name="Freeform 3"/>
+          <p:cNvSpPr/>
+          <p:nvPr/>
+        </p:nvSpPr>
+        <p:spPr>
+          <a:xfrm>
+            <a:off x="0" y="1"/>
+            <a:ext cx="15112999" cy="1502610"/>
+          </a:xfrm>
+          <a:custGeom>
+            <a:avLst/>
+            <a:gdLst/>
+            <a:ahLst/>
+            <a:cxnLst/>
+            <a:rect l="l" t="t" r="r" b="b"/>
+            <a:pathLst>
+              <a:path w="2413391" h="522197">
+                <a:moveTo>
+                  <a:pt x="0" y="0"/>
+                </a:moveTo>
+                <a:lnTo>
+                  <a:pt x="2413391" y="0"/>
+                </a:lnTo>
+                <a:lnTo>
+                  <a:pt x="2413391" y="522197"/>
+                </a:lnTo>
+                <a:lnTo>
+                  <a:pt x="0" y="522197"/>
+                </a:lnTo>
+                <a:close/>
+              </a:path>
+            </a:pathLst>
+          </a:custGeom>
+          <a:solidFill>
+            <a:schemeClr val="bg1">
+              <a:lumMod val="95000"/>
+            </a:schemeClr>
+          </a:solidFill>
+          <a:ln w="28575" cap="sq" cmpd="sng">
+            <a:solidFill>
+              <a:schemeClr val="tx1"/>
+            </a:solidFill>
+            <a:prstDash val="lgDashDot"/>
+            <a:miter/>
+          </a:ln>
+        </p:spPr>
+      </p:sp>
+      <p:pic>
+        <p:nvPicPr>
+          <p:cNvPr id="8" name="Picture 7"/>
+          <p:cNvPicPr>
+            <a:picLocks noChangeAspect="1"/>
+          </p:cNvPicPr>
+          <p:nvPr/>
+        </p:nvPicPr>
+        <p:blipFill>
           <a:blip r:embed="rId5"/>
           <a:stretch>
             <a:fillRect/>
@@ -5093,18 +5048,169 @@
         </p:blipFill>
         <p:spPr>
           <a:xfrm>
-            <a:off x="535951" y="9086850"/>
-            <a:ext cx="7020901" cy="3022744"/>
+            <a:off x="165100" y="171450"/>
+            <a:ext cx="1143000" cy="1143000"/>
           </a:xfrm>
           <a:prstGeom prst="rect">
             <a:avLst/>
           </a:prstGeom>
         </p:spPr>
       </p:pic>
+      <p:sp>
+        <p:nvSpPr>
+          <p:cNvPr id="68" name="TextBox 37"/>
+          <p:cNvSpPr txBox="1"/>
+          <p:nvPr/>
+        </p:nvSpPr>
+        <p:spPr>
+          <a:xfrm>
+            <a:off x="1445249" y="314920"/>
+            <a:ext cx="6644651" cy="923330"/>
+          </a:xfrm>
+          <a:prstGeom prst="rect">
+            <a:avLst/>
+          </a:prstGeom>
+        </p:spPr>
+        <p:txBody>
+          <a:bodyPr wrap="square" lIns="0" tIns="0" rIns="0" bIns="0" rtlCol="0" anchor="t">
+            <a:spAutoFit/>
+          </a:bodyPr>
+          <a:lstStyle/>
+          <a:p>
+            <a:pPr>
+              <a:lnSpc>
+                <a:spcPts val="3590"/>
+              </a:lnSpc>
+            </a:pPr>
+            <a:r>
+              <a:rPr lang="en-US" sz="2800" b="1" spc="364" smtClean="0">
+                <a:solidFill>
+                  <a:srgbClr val="001D7A"/>
+                </a:solidFill>
+                <a:latin typeface="Calibri Bold" panose="020F0702030404030204" pitchFamily="34" charset="0"/>
+                <a:ea typeface="Touvlo Bold" panose="020B0804030403020204"/>
+                <a:cs typeface="Calibri Bold" panose="020F0702030404030204" pitchFamily="34" charset="0"/>
+                <a:sym typeface="Touvlo Bold" panose="020B0804030403020204"/>
+              </a:rPr>
+              <a:t>TRƯỜNG KỸ THUẬT VÀ CÔNG NGHỆ 	TRƯỜNG ĐẠI HỌC TRÀ VINH</a:t>
+            </a:r>
+            <a:endParaRPr lang="en-US" sz="2800" b="1" spc="364">
+              <a:solidFill>
+                <a:srgbClr val="001D7A"/>
+              </a:solidFill>
+              <a:latin typeface="Calibri Bold" panose="020F0702030404030204" pitchFamily="34" charset="0"/>
+              <a:ea typeface="Touvlo Bold" panose="020B0804030403020204"/>
+              <a:cs typeface="Calibri Bold" panose="020F0702030404030204" pitchFamily="34" charset="0"/>
+              <a:sym typeface="Touvlo Bold" panose="020B0804030403020204"/>
+            </a:endParaRPr>
+          </a:p>
+        </p:txBody>
+      </p:sp>
+      <p:cxnSp>
+        <p:nvCxnSpPr>
+          <p:cNvPr id="16" name="Straight Connector 15"/>
+          <p:cNvCxnSpPr/>
+          <p:nvPr/>
+        </p:nvCxnSpPr>
+        <p:spPr>
+          <a:xfrm>
+            <a:off x="8318500" y="109703"/>
+            <a:ext cx="0" cy="1204747"/>
+          </a:xfrm>
+          <a:prstGeom prst="line">
+            <a:avLst/>
+          </a:prstGeom>
+        </p:spPr>
+        <p:style>
+          <a:lnRef idx="1">
+            <a:schemeClr val="dk1"/>
+          </a:lnRef>
+          <a:fillRef idx="0">
+            <a:schemeClr val="dk1"/>
+          </a:fillRef>
+          <a:effectRef idx="0">
+            <a:schemeClr val="dk1"/>
+          </a:effectRef>
+          <a:fontRef idx="minor">
+            <a:schemeClr val="tx1"/>
+          </a:fontRef>
+        </p:style>
+      </p:cxnSp>
+      <p:sp>
+        <p:nvSpPr>
+          <p:cNvPr id="69" name="TextBox 37"/>
+          <p:cNvSpPr txBox="1"/>
+          <p:nvPr/>
+        </p:nvSpPr>
+        <p:spPr>
+          <a:xfrm>
+            <a:off x="8680200" y="360427"/>
+            <a:ext cx="6644651" cy="923330"/>
+          </a:xfrm>
+          <a:prstGeom prst="rect">
+            <a:avLst/>
+          </a:prstGeom>
+        </p:spPr>
+        <p:txBody>
+          <a:bodyPr wrap="square" lIns="0" tIns="0" rIns="0" bIns="0" rtlCol="0" anchor="t">
+            <a:spAutoFit/>
+          </a:bodyPr>
+          <a:lstStyle/>
+          <a:p>
+            <a:pPr>
+              <a:lnSpc>
+                <a:spcPts val="3590"/>
+              </a:lnSpc>
+            </a:pPr>
+            <a:r>
+              <a:rPr lang="en-US" sz="2800" b="1" spc="364" smtClean="0">
+                <a:solidFill>
+                  <a:srgbClr val="001D7A"/>
+                </a:solidFill>
+                <a:latin typeface="Calibri Bold" panose="020F0702030404030204" pitchFamily="34" charset="0"/>
+                <a:ea typeface="Touvlo Bold" panose="020B0804030403020204"/>
+                <a:cs typeface="Calibri Bold" panose="020F0702030404030204" pitchFamily="34" charset="0"/>
+                <a:sym typeface="Touvlo Bold" panose="020B0804030403020204"/>
+              </a:rPr>
+              <a:t>GVHD: TS.ĐOÀN PHƯỚC MIỀN</a:t>
+            </a:r>
+          </a:p>
+          <a:p>
+            <a:pPr>
+              <a:lnSpc>
+                <a:spcPts val="3590"/>
+              </a:lnSpc>
+            </a:pPr>
+            <a:r>
+              <a:rPr lang="en-US" sz="2800" b="1" spc="364" smtClean="0">
+                <a:solidFill>
+                  <a:srgbClr val="001D7A"/>
+                </a:solidFill>
+                <a:latin typeface="Calibri Bold" panose="020F0702030404030204" pitchFamily="34" charset="0"/>
+                <a:ea typeface="Touvlo Bold" panose="020B0804030403020204"/>
+                <a:cs typeface="Calibri Bold" panose="020F0702030404030204" pitchFamily="34" charset="0"/>
+                <a:sym typeface="Touvlo Bold" panose="020B0804030403020204"/>
+              </a:rPr>
+              <a:t>SVTH: THẠCH NGUYỄN QUẾ ANH</a:t>
+            </a:r>
+            <a:endParaRPr lang="en-US" sz="2800" b="1" spc="364">
+              <a:solidFill>
+                <a:srgbClr val="001D7A"/>
+              </a:solidFill>
+              <a:latin typeface="Calibri Bold" panose="020F0702030404030204" pitchFamily="34" charset="0"/>
+              <a:ea typeface="Touvlo Bold" panose="020B0804030403020204"/>
+              <a:cs typeface="Calibri Bold" panose="020F0702030404030204" pitchFamily="34" charset="0"/>
+              <a:sym typeface="Touvlo Bold" panose="020B0804030403020204"/>
+            </a:endParaRPr>
+          </a:p>
+        </p:txBody>
+      </p:sp>
       <p:pic>
         <p:nvPicPr>
-          <p:cNvPr id="63" name="Picture 62"/>
-          <p:cNvPicPr/>
+          <p:cNvPr id="9" name="Picture 8"/>
+          <p:cNvPicPr>
+            <a:picLocks noChangeAspect="1"/>
+          </p:cNvPicPr>
           <p:nvPr/>
         </p:nvPicPr>
         <p:blipFill>
@@ -5115,12 +5221,60 @@
         </p:blipFill>
         <p:spPr>
           <a:xfrm>
-            <a:off x="7887273" y="12744450"/>
-            <a:ext cx="6679625" cy="2970331"/>
+            <a:off x="7722895" y="6071180"/>
+            <a:ext cx="7301205" cy="3625270"/>
           </a:xfrm>
           <a:prstGeom prst="rect">
             <a:avLst/>
           </a:prstGeom>
+          <a:solidFill>
+            <a:schemeClr val="bg1">
+              <a:lumMod val="95000"/>
+            </a:schemeClr>
+          </a:solidFill>
+          <a:ln w="28575" cap="sq" cmpd="sng">
+            <a:solidFill>
+              <a:schemeClr val="tx1"/>
+            </a:solidFill>
+            <a:prstDash val="lgDashDot"/>
+            <a:miter/>
+          </a:ln>
+        </p:spPr>
+      </p:pic>
+      <p:pic>
+        <p:nvPicPr>
+          <p:cNvPr id="18" name="Picture 17"/>
+          <p:cNvPicPr>
+            <a:picLocks noChangeAspect="1"/>
+          </p:cNvPicPr>
+          <p:nvPr/>
+        </p:nvPicPr>
+        <p:blipFill>
+          <a:blip r:embed="rId7"/>
+          <a:stretch>
+            <a:fillRect/>
+          </a:stretch>
+        </p:blipFill>
+        <p:spPr>
+          <a:xfrm>
+            <a:off x="7666903" y="12600526"/>
+            <a:ext cx="7357197" cy="3043031"/>
+          </a:xfrm>
+          <a:prstGeom prst="rect">
+            <a:avLst/>
+          </a:prstGeom>
+          <a:solidFill>
+            <a:schemeClr val="bg1">
+              <a:lumMod val="95000"/>
+            </a:schemeClr>
+          </a:solidFill>
+          <a:ln w="28575" cap="sq" cmpd="sng">
+            <a:solidFill>
+              <a:schemeClr val="tx1"/>
+            </a:solidFill>
+            <a:prstDash val="lgDashDot"/>
+            <a:miter/>
+          </a:ln>
         </p:spPr>
       </p:pic>
     </p:spTree>
@@ -5418,5 +5572,10 @@
   </a:themeElements>
   <a:objectDefaults/>
   <a:extraClrSchemeLst/>
+  <a:extLst>
+    <a:ext uri="{05A4C25C-085E-4340-85A3-A5531E510DB2}">
+      <thm15:themeFamily xmlns:thm15="http://schemas.microsoft.com/office/thememl/2012/main" name="Office Theme" id="{62F939B6-93AF-4DB8-9C6B-D6C7DFDC589F}" vid="{4A3C46E8-61CC-4603-A589-7422A47A8E4A}"/>
+    </a:ext>
+  </a:extLst>
 </a:theme>
 </file>
--- a/thesis/PosterDACSN.pptx
+++ b/thesis/PosterDACSN.pptx
@@ -11,15 +11,15 @@
   <p:notesSz cx="6858000" cy="9144000"/>
   <p:embeddedFontLst>
     <p:embeddedFont>
-      <p:font typeface="Calibri" panose="020F0502020204030204" pitchFamily="34" charset="0"/>
-      <p:regular r:id="rId3"/>
-      <p:bold r:id="rId4"/>
-      <p:italic r:id="rId5"/>
-      <p:boldItalic r:id="rId6"/>
+      <p:font typeface="Calibri Bold" panose="020F0702030404030204" pitchFamily="34" charset="0"/>
+      <p:bold r:id="rId3"/>
     </p:embeddedFont>
     <p:embeddedFont>
-      <p:font typeface="Calibri Bold" panose="020F0702030404030204" pitchFamily="34" charset="0"/>
-      <p:bold r:id="rId7"/>
+      <p:font typeface="Calibri" panose="020F0502020204030204" pitchFamily="34" charset="0"/>
+      <p:regular r:id="rId4"/>
+      <p:bold r:id="rId5"/>
+      <p:italic r:id="rId6"/>
+      <p:boldItalic r:id="rId7"/>
     </p:embeddedFont>
   </p:embeddedFontLst>
   <p:defaultTextStyle>
@@ -317,7 +317,7 @@
           <a:p>
             <a:fld id="{1D8BD707-D9CF-40AE-B4C6-C98DA3205C09}" type="datetimeFigureOut">
               <a:rPr lang="en-US" smtClean="0"/>
-              <a:t>1/4/2026</a:t>
+              <a:t>1/5/2026</a:t>
             </a:fld>
             <a:endParaRPr lang="en-US"/>
           </a:p>
@@ -482,7 +482,7 @@
           <a:p>
             <a:fld id="{1D8BD707-D9CF-40AE-B4C6-C98DA3205C09}" type="datetimeFigureOut">
               <a:rPr lang="en-US" smtClean="0"/>
-              <a:t>1/4/2026</a:t>
+              <a:t>1/5/2026</a:t>
             </a:fld>
             <a:endParaRPr lang="en-US"/>
           </a:p>
@@ -657,7 +657,7 @@
           <a:p>
             <a:fld id="{1D8BD707-D9CF-40AE-B4C6-C98DA3205C09}" type="datetimeFigureOut">
               <a:rPr lang="en-US" smtClean="0"/>
-              <a:t>1/4/2026</a:t>
+              <a:t>1/5/2026</a:t>
             </a:fld>
             <a:endParaRPr lang="en-US"/>
           </a:p>
@@ -822,7 +822,7 @@
           <a:p>
             <a:fld id="{1D8BD707-D9CF-40AE-B4C6-C98DA3205C09}" type="datetimeFigureOut">
               <a:rPr lang="en-US" smtClean="0"/>
-              <a:t>1/4/2026</a:t>
+              <a:t>1/5/2026</a:t>
             </a:fld>
             <a:endParaRPr lang="en-US"/>
           </a:p>
@@ -1063,7 +1063,7 @@
           <a:p>
             <a:fld id="{1D8BD707-D9CF-40AE-B4C6-C98DA3205C09}" type="datetimeFigureOut">
               <a:rPr lang="en-US" smtClean="0"/>
-              <a:t>1/4/2026</a:t>
+              <a:t>1/5/2026</a:t>
             </a:fld>
             <a:endParaRPr lang="en-US"/>
           </a:p>
@@ -1346,7 +1346,7 @@
           <a:p>
             <a:fld id="{1D8BD707-D9CF-40AE-B4C6-C98DA3205C09}" type="datetimeFigureOut">
               <a:rPr lang="en-US" smtClean="0"/>
-              <a:t>1/4/2026</a:t>
+              <a:t>1/5/2026</a:t>
             </a:fld>
             <a:endParaRPr lang="en-US"/>
           </a:p>
@@ -1763,7 +1763,7 @@
           <a:p>
             <a:fld id="{1D8BD707-D9CF-40AE-B4C6-C98DA3205C09}" type="datetimeFigureOut">
               <a:rPr lang="en-US" smtClean="0"/>
-              <a:t>1/4/2026</a:t>
+              <a:t>1/5/2026</a:t>
             </a:fld>
             <a:endParaRPr lang="en-US"/>
           </a:p>
@@ -1876,7 +1876,7 @@
           <a:p>
             <a:fld id="{1D8BD707-D9CF-40AE-B4C6-C98DA3205C09}" type="datetimeFigureOut">
               <a:rPr lang="en-US" smtClean="0"/>
-              <a:t>1/4/2026</a:t>
+              <a:t>1/5/2026</a:t>
             </a:fld>
             <a:endParaRPr lang="en-US"/>
           </a:p>
@@ -1966,7 +1966,7 @@
           <a:p>
             <a:fld id="{1D8BD707-D9CF-40AE-B4C6-C98DA3205C09}" type="datetimeFigureOut">
               <a:rPr lang="en-US" smtClean="0"/>
-              <a:t>1/4/2026</a:t>
+              <a:t>1/5/2026</a:t>
             </a:fld>
             <a:endParaRPr lang="en-US"/>
           </a:p>
@@ -2238,7 +2238,7 @@
           <a:p>
             <a:fld id="{1D8BD707-D9CF-40AE-B4C6-C98DA3205C09}" type="datetimeFigureOut">
               <a:rPr lang="en-US" smtClean="0"/>
-              <a:t>1/4/2026</a:t>
+              <a:t>1/5/2026</a:t>
             </a:fld>
             <a:endParaRPr lang="en-US"/>
           </a:p>
@@ -2486,7 +2486,7 @@
           <a:p>
             <a:fld id="{1D8BD707-D9CF-40AE-B4C6-C98DA3205C09}" type="datetimeFigureOut">
               <a:rPr lang="en-US" smtClean="0"/>
-              <a:t>1/4/2026</a:t>
+              <a:t>1/5/2026</a:t>
             </a:fld>
             <a:endParaRPr lang="en-US"/>
           </a:p>
@@ -2694,7 +2694,7 @@
           <a:p>
             <a:fld id="{1D8BD707-D9CF-40AE-B4C6-C98DA3205C09}" type="datetimeFigureOut">
               <a:rPr lang="en-US" smtClean="0"/>
-              <a:t>1/4/2026</a:t>
+              <a:t>1/5/2026</a:t>
             </a:fld>
             <a:endParaRPr lang="en-US"/>
           </a:p>
@@ -3082,7 +3082,7 @@
         </p:nvSpPr>
         <p:spPr>
           <a:xfrm>
-            <a:off x="24373" y="1568094"/>
+            <a:off x="24373" y="1162050"/>
             <a:ext cx="15088625" cy="1860322"/>
           </a:xfrm>
           <a:custGeom>
@@ -3131,7 +3131,7 @@
         </p:nvSpPr>
         <p:spPr>
           <a:xfrm>
-            <a:off x="53437" y="3562479"/>
+            <a:off x="53437" y="3143250"/>
             <a:ext cx="7438537" cy="2296161"/>
           </a:xfrm>
           <a:custGeom>
@@ -3180,7 +3180,7 @@
         </p:nvGrpSpPr>
         <p:grpSpPr>
           <a:xfrm>
-            <a:off x="24372" y="6074126"/>
+            <a:off x="24372" y="5730485"/>
             <a:ext cx="7439725" cy="2899165"/>
             <a:chOff x="0" y="0"/>
             <a:chExt cx="1206695" cy="1306406"/>
@@ -3287,8 +3287,8 @@
         </p:nvGrpSpPr>
         <p:grpSpPr>
           <a:xfrm>
-            <a:off x="7628999" y="3748385"/>
-            <a:ext cx="7395102" cy="2138065"/>
+            <a:off x="7628999" y="3367386"/>
+            <a:ext cx="7395102" cy="2072026"/>
             <a:chOff x="0" y="0"/>
             <a:chExt cx="1170533" cy="465858"/>
           </a:xfrm>
@@ -3394,7 +3394,7 @@
         </p:nvSpPr>
         <p:spPr>
           <a:xfrm>
-            <a:off x="53437" y="12127663"/>
+            <a:off x="53437" y="11854725"/>
             <a:ext cx="7410660" cy="2766923"/>
           </a:xfrm>
           <a:custGeom>
@@ -3435,113 +3435,6 @@
           </a:ln>
         </p:spPr>
       </p:sp>
-      <p:grpSp>
-        <p:nvGrpSpPr>
-          <p:cNvPr id="19" name="Group 19"/>
-          <p:cNvGrpSpPr/>
-          <p:nvPr/>
-        </p:nvGrpSpPr>
-        <p:grpSpPr>
-          <a:xfrm>
-            <a:off x="7745935" y="16097250"/>
-            <a:ext cx="7278165" cy="2227659"/>
-            <a:chOff x="0" y="0"/>
-            <a:chExt cx="1170533" cy="381732"/>
-          </a:xfrm>
-        </p:grpSpPr>
-        <p:sp>
-          <p:nvSpPr>
-            <p:cNvPr id="20" name="Freeform 20"/>
-            <p:cNvSpPr/>
-            <p:nvPr/>
-          </p:nvSpPr>
-          <p:spPr>
-            <a:xfrm>
-              <a:off x="0" y="0"/>
-              <a:ext cx="1170533" cy="381732"/>
-            </a:xfrm>
-            <a:custGeom>
-              <a:avLst/>
-              <a:gdLst/>
-              <a:ahLst/>
-              <a:cxnLst/>
-              <a:rect l="l" t="t" r="r" b="b"/>
-              <a:pathLst>
-                <a:path w="1170533" h="381732">
-                  <a:moveTo>
-                    <a:pt x="0" y="0"/>
-                  </a:moveTo>
-                  <a:lnTo>
-                    <a:pt x="1170533" y="0"/>
-                  </a:lnTo>
-                  <a:lnTo>
-                    <a:pt x="1170533" y="381732"/>
-                  </a:lnTo>
-                  <a:lnTo>
-                    <a:pt x="0" y="381732"/>
-                  </a:lnTo>
-                  <a:close/>
-                </a:path>
-              </a:pathLst>
-            </a:custGeom>
-            <a:solidFill>
-              <a:schemeClr val="bg1">
-                <a:lumMod val="95000"/>
-              </a:schemeClr>
-            </a:solidFill>
-            <a:ln w="28575" cap="sq" cmpd="sng">
-              <a:solidFill>
-                <a:schemeClr val="tx1"/>
-              </a:solidFill>
-              <a:prstDash val="lgDashDot"/>
-              <a:miter/>
-            </a:ln>
-          </p:spPr>
-        </p:sp>
-        <p:sp>
-          <p:nvSpPr>
-            <p:cNvPr id="21" name="TextBox 21"/>
-            <p:cNvSpPr txBox="1"/>
-            <p:nvPr/>
-          </p:nvSpPr>
-          <p:spPr>
-            <a:xfrm>
-              <a:off x="0" y="-47625"/>
-              <a:ext cx="1170533" cy="429357"/>
-            </a:xfrm>
-            <a:prstGeom prst="rect">
-              <a:avLst/>
-            </a:prstGeom>
-            <a:solidFill>
-              <a:schemeClr val="bg1">
-                <a:lumMod val="95000"/>
-              </a:schemeClr>
-            </a:solidFill>
-            <a:ln w="28575" cap="sq" cmpd="sng">
-              <a:solidFill>
-                <a:schemeClr val="tx1"/>
-              </a:solidFill>
-              <a:prstDash val="lgDashDot"/>
-              <a:miter/>
-            </a:ln>
-          </p:spPr>
-          <p:txBody>
-            <a:bodyPr lIns="44941" tIns="44941" rIns="44941" bIns="44941" rtlCol="0" anchor="ctr"/>
-            <a:lstStyle/>
-            <a:p>
-              <a:pPr algn="ctr">
-                <a:lnSpc>
-                  <a:spcPts val="3840"/>
-                </a:lnSpc>
-                <a:spcBef>
-                  <a:spcPct val="0"/>
-                </a:spcBef>
-              </a:pPr>
-              <a:endParaRPr/>
-            </a:p>
-          </p:txBody>
-        </p:sp>
-      </p:grpSp>
       <p:sp>
         <p:nvSpPr>
           <p:cNvPr id="22" name="AutoShape 22"/>
@@ -3550,7 +3443,7 @@
         </p:nvSpPr>
         <p:spPr>
           <a:xfrm>
-            <a:off x="77598" y="4210050"/>
+            <a:off x="77598" y="3790821"/>
             <a:ext cx="4659502" cy="0"/>
           </a:xfrm>
           <a:prstGeom prst="line">
@@ -3574,7 +3467,7 @@
         </p:nvSpPr>
         <p:spPr>
           <a:xfrm>
-            <a:off x="12700" y="6572250"/>
+            <a:off x="12700" y="6228609"/>
             <a:ext cx="5039349" cy="0"/>
           </a:xfrm>
           <a:prstGeom prst="line">
@@ -3598,7 +3491,7 @@
         </p:nvSpPr>
         <p:spPr>
           <a:xfrm>
-            <a:off x="7632700" y="4144319"/>
+            <a:off x="7632700" y="3763319"/>
             <a:ext cx="4115253" cy="0"/>
           </a:xfrm>
           <a:prstGeom prst="line">
@@ -3622,7 +3515,7 @@
         </p:nvSpPr>
         <p:spPr>
           <a:xfrm>
-            <a:off x="59560" y="12820650"/>
+            <a:off x="59560" y="12547712"/>
             <a:ext cx="4982340" cy="0"/>
           </a:xfrm>
           <a:prstGeom prst="line">
@@ -3646,7 +3539,7 @@
         </p:nvSpPr>
         <p:spPr>
           <a:xfrm>
-            <a:off x="53437" y="18324910"/>
+            <a:off x="53437" y="18281094"/>
             <a:ext cx="7438538" cy="2871000"/>
           </a:xfrm>
           <a:custGeom>
@@ -3695,7 +3588,7 @@
         </p:nvSpPr>
         <p:spPr>
           <a:xfrm>
-            <a:off x="12700" y="19069050"/>
+            <a:off x="12700" y="19025234"/>
             <a:ext cx="4634035" cy="0"/>
           </a:xfrm>
           <a:prstGeom prst="line">
@@ -3719,7 +3612,7 @@
         </p:nvSpPr>
         <p:spPr>
           <a:xfrm>
-            <a:off x="622300" y="1616212"/>
+            <a:off x="622300" y="1210168"/>
             <a:ext cx="13716000" cy="1916747"/>
           </a:xfrm>
           <a:prstGeom prst="rect">
@@ -3780,7 +3673,7 @@
         </p:nvSpPr>
         <p:spPr>
           <a:xfrm>
-            <a:off x="180992" y="3748385"/>
+            <a:off x="180992" y="3329156"/>
             <a:ext cx="4860908" cy="461665"/>
           </a:xfrm>
           <a:prstGeom prst="rect">
@@ -3821,7 +3714,7 @@
         </p:nvSpPr>
         <p:spPr>
           <a:xfrm>
-            <a:off x="53437" y="6156007"/>
+            <a:off x="53437" y="5734050"/>
             <a:ext cx="6944702" cy="492443"/>
           </a:xfrm>
           <a:prstGeom prst="rect">
@@ -3858,7 +3751,7 @@
         </p:nvSpPr>
         <p:spPr>
           <a:xfrm>
-            <a:off x="206890" y="12308563"/>
+            <a:off x="206890" y="12035625"/>
             <a:ext cx="4911210" cy="461665"/>
           </a:xfrm>
           <a:prstGeom prst="rect">
@@ -3899,7 +3792,7 @@
         </p:nvSpPr>
         <p:spPr>
           <a:xfrm>
-            <a:off x="129637" y="18607385"/>
+            <a:off x="129637" y="18563569"/>
             <a:ext cx="6349937" cy="461665"/>
           </a:xfrm>
           <a:prstGeom prst="rect">
@@ -3918,7 +3811,7 @@
               </a:lnSpc>
             </a:pPr>
             <a:r>
-              <a:rPr lang="en-US" sz="3200" b="1" spc="364">
+              <a:rPr lang="en-US" sz="3200" b="1" spc="364" smtClean="0">
                 <a:solidFill>
                   <a:srgbClr val="001D7A"/>
                 </a:solidFill>
@@ -3927,49 +3820,17 @@
                 <a:cs typeface="Calibri Bold" panose="020F0702030404030204" pitchFamily="34" charset="0"/>
                 <a:sym typeface="Touvlo Bold" panose="020B0804030403020204"/>
               </a:rPr>
-              <a:t>HẠN CHẾ CỦA HỆ THỐNG</a:t>
-            </a:r>
-          </a:p>
-        </p:txBody>
-      </p:sp>
-      <p:sp>
-        <p:nvSpPr>
-          <p:cNvPr id="41" name="TextBox 41"/>
-          <p:cNvSpPr txBox="1"/>
-          <p:nvPr/>
-        </p:nvSpPr>
-        <p:spPr>
-          <a:xfrm>
-            <a:off x="7825837" y="16004505"/>
-            <a:ext cx="5293263" cy="397545"/>
-          </a:xfrm>
-          <a:prstGeom prst="rect">
-            <a:avLst/>
-          </a:prstGeom>
-        </p:spPr>
-        <p:txBody>
-          <a:bodyPr wrap="square" lIns="0" tIns="0" rIns="0" bIns="0" rtlCol="0" anchor="t">
-            <a:spAutoFit/>
-          </a:bodyPr>
-          <a:lstStyle/>
-          <a:p>
-            <a:pPr algn="l">
-              <a:lnSpc>
-                <a:spcPts val="3095"/>
-              </a:lnSpc>
-            </a:pPr>
-            <a:r>
-              <a:rPr lang="en-US" sz="3200" b="1" spc="314">
-                <a:solidFill>
-                  <a:srgbClr val="001D7A"/>
-                </a:solidFill>
-                <a:latin typeface="Calibri Bold" panose="020F0702030404030204" pitchFamily="34" charset="0"/>
-                <a:ea typeface="Touvlo Bold" panose="020B0804030403020204"/>
-                <a:cs typeface="Calibri Bold" panose="020F0702030404030204" pitchFamily="34" charset="0"/>
-                <a:sym typeface="Touvlo Bold" panose="020B0804030403020204"/>
-              </a:rPr>
-              <a:t>CÔNG NGHỆ SỬ DỤNG</a:t>
-            </a:r>
+              <a:t>HƯỚNG PHÁT TRIỂN</a:t>
+            </a:r>
+            <a:endParaRPr lang="en-US" sz="3200" b="1" spc="364">
+              <a:solidFill>
+                <a:srgbClr val="001D7A"/>
+              </a:solidFill>
+              <a:latin typeface="Calibri Bold" panose="020F0702030404030204" pitchFamily="34" charset="0"/>
+              <a:ea typeface="Touvlo Bold" panose="020B0804030403020204"/>
+              <a:cs typeface="Calibri Bold" panose="020F0702030404030204" pitchFamily="34" charset="0"/>
+              <a:sym typeface="Touvlo Bold" panose="020B0804030403020204"/>
+            </a:endParaRPr>
           </a:p>
         </p:txBody>
       </p:sp>
@@ -3981,7 +3842,7 @@
         </p:nvSpPr>
         <p:spPr>
           <a:xfrm>
-            <a:off x="-79704" y="4482586"/>
+            <a:off x="-79704" y="4063357"/>
             <a:ext cx="7543801" cy="1415772"/>
           </a:xfrm>
           <a:prstGeom prst="rect">
@@ -4069,7 +3930,7 @@
         </p:nvSpPr>
         <p:spPr>
           <a:xfrm>
-            <a:off x="7556499" y="4193276"/>
+            <a:off x="7556499" y="3812276"/>
             <a:ext cx="4197247" cy="1477328"/>
           </a:xfrm>
           <a:prstGeom prst="rect">
@@ -4163,7 +4024,7 @@
         </p:nvSpPr>
         <p:spPr>
           <a:xfrm>
-            <a:off x="217921" y="6601733"/>
+            <a:off x="217921" y="6267450"/>
             <a:ext cx="6753504" cy="2677656"/>
           </a:xfrm>
           <a:prstGeom prst="rect">
@@ -4266,7 +4127,7 @@
         </p:nvSpPr>
         <p:spPr>
           <a:xfrm>
-            <a:off x="165100" y="12930988"/>
+            <a:off x="165100" y="12658050"/>
             <a:ext cx="6361739" cy="2215991"/>
           </a:xfrm>
           <a:prstGeom prst="rect">
@@ -4354,8 +4215,8 @@
         </p:nvSpPr>
         <p:spPr>
           <a:xfrm>
-            <a:off x="698500" y="19145250"/>
-            <a:ext cx="6393501" cy="2101216"/>
+            <a:off x="133338" y="19159447"/>
+            <a:ext cx="6393501" cy="1846659"/>
           </a:xfrm>
           <a:prstGeom prst="rect">
             <a:avLst/>
@@ -4367,164 +4228,69 @@
           </a:bodyPr>
           <a:lstStyle/>
           <a:p>
-            <a:pPr marL="357505" lvl="1" indent="-178435" algn="l">
+            <a:pPr marL="357505" lvl="1" indent="-178435">
               <a:buFont typeface="Arial" panose="020B0604020202020204"/>
               <a:buChar char="•"/>
             </a:pPr>
             <a:r>
-              <a:rPr lang="en-US" sz="2400">
+              <a:rPr lang="vi-VN" sz="2400">
                 <a:solidFill>
                   <a:srgbClr val="000000"/>
                 </a:solidFill>
-                <a:latin typeface="Arial" panose="020B0604020202020204" pitchFamily="34" charset="0"/>
-                <a:ea typeface="Touvlo" panose="020B0604030403020204"/>
+                <a:ea typeface="Inter"/>
                 <a:cs typeface="Arial" panose="020B0604020202020204" pitchFamily="34" charset="0"/>
-                <a:sym typeface="Touvlo" panose="020B0604030403020204"/>
+                <a:sym typeface="Inter"/>
               </a:rPr>
-              <a:t>Thiết kế giao diện, màu sắc vẫn chưa được chuyên nghiệp. </a:t>
-            </a:r>
-          </a:p>
-          <a:p>
-            <a:pPr marL="357505" lvl="1" indent="-178435" algn="l">
-              <a:buFont typeface="Arial" panose="020B0604020202020204"/>
-              <a:buChar char="•"/>
-            </a:pPr>
-            <a:r>
-              <a:rPr lang="en-US" sz="2400">
+              <a:t>Tích hợp mã vạch để tự động hóa quy trình mượn – trả</a:t>
+            </a:r>
+            <a:r>
+              <a:rPr lang="vi-VN" sz="2400">
                 <a:solidFill>
                   <a:srgbClr val="000000"/>
                 </a:solidFill>
-                <a:latin typeface="Arial" panose="020B0604020202020204" pitchFamily="34" charset="0"/>
-                <a:ea typeface="Touvlo" panose="020B0604030403020204"/>
+                <a:ea typeface="Inter"/>
                 <a:cs typeface="Arial" panose="020B0604020202020204" pitchFamily="34" charset="0"/>
-                <a:sym typeface="Touvlo" panose="020B0604030403020204"/>
+                <a:sym typeface="Inter"/>
               </a:rPr>
-              <a:t>Chưa tích hợp công nghệ nâng cao (QR code, RFID).</a:t>
-            </a:r>
-          </a:p>
-          <a:p>
-            <a:pPr marL="357505" lvl="1" indent="-178435" algn="l">
-              <a:buFont typeface="Arial" panose="020B0604020202020204"/>
+              <a:t>. </a:t>
+            </a:r>
+            <a:endParaRPr lang="en-US" sz="2400" smtClean="0">
+              <a:solidFill>
+                <a:srgbClr val="000000"/>
+              </a:solidFill>
+              <a:ea typeface="Inter"/>
+              <a:cs typeface="Arial" panose="020B0604020202020204" pitchFamily="34" charset="0"/>
+              <a:sym typeface="Inter"/>
+            </a:endParaRPr>
+          </a:p>
+          <a:p>
+            <a:pPr marL="342900" indent="-342900">
+              <a:lnSpc>
+                <a:spcPct val="150000"/>
+              </a:lnSpc>
+              <a:buFont typeface="Arial" panose="020B0604020202020204" pitchFamily="34" charset="0"/>
               <a:buChar char="•"/>
             </a:pPr>
             <a:r>
-              <a:rPr lang="en-US" sz="2400">
+              <a:rPr lang="vi-VN" sz="2400">
                 <a:solidFill>
                   <a:srgbClr val="000000"/>
                 </a:solidFill>
-                <a:latin typeface="Arial" panose="020B0604020202020204" pitchFamily="34" charset="0"/>
-                <a:ea typeface="Touvlo" panose="020B0604030403020204"/>
+                <a:ea typeface="Inter"/>
                 <a:cs typeface="Arial" panose="020B0604020202020204" pitchFamily="34" charset="0"/>
-                <a:sym typeface="Touvlo" panose="020B0604030403020204"/>
+                <a:sym typeface="Inter"/>
               </a:rPr>
-              <a:t>Chưa hỗ trợ quản lý nhiều thư viện.</a:t>
-            </a:r>
-          </a:p>
-          <a:p>
-            <a:pPr algn="l"/>
-            <a:endParaRPr lang="en-US" sz="1655">
+              <a:t>Bổ sung chức năng đặt sách trực tuyến, gia hạn mượn.</a:t>
+            </a:r>
+            <a:endParaRPr lang="en-US" sz="2400">
               <a:solidFill>
                 <a:srgbClr val="000000"/>
               </a:solidFill>
-              <a:latin typeface="Touvlo" panose="020B0604030403020204"/>
-              <a:ea typeface="Touvlo" panose="020B0604030403020204"/>
-              <a:cs typeface="Touvlo" panose="020B0604030403020204"/>
-              <a:sym typeface="Touvlo" panose="020B0604030403020204"/>
+              <a:latin typeface="Arial" panose="020B0604020202020204" pitchFamily="34" charset="0"/>
+              <a:ea typeface="Inter"/>
+              <a:cs typeface="Arial" panose="020B0604020202020204" pitchFamily="34" charset="0"/>
+              <a:sym typeface="Inter"/>
             </a:endParaRPr>
-          </a:p>
-        </p:txBody>
-      </p:sp>
-      <p:sp>
-        <p:nvSpPr>
-          <p:cNvPr id="47" name="TextBox 47"/>
-          <p:cNvSpPr txBox="1"/>
-          <p:nvPr/>
-        </p:nvSpPr>
-        <p:spPr>
-          <a:xfrm>
-            <a:off x="7861300" y="16478250"/>
-            <a:ext cx="5787265" cy="1846659"/>
-          </a:xfrm>
-          <a:prstGeom prst="rect">
-            <a:avLst/>
-          </a:prstGeom>
-        </p:spPr>
-        <p:txBody>
-          <a:bodyPr wrap="square" lIns="0" tIns="0" rIns="0" bIns="0" rtlCol="0" anchor="t">
-            <a:spAutoFit/>
-          </a:bodyPr>
-          <a:lstStyle/>
-          <a:p>
-            <a:pPr marL="360045" lvl="1" indent="-179705" algn="l">
-              <a:buFont typeface="Arial" panose="020B0604020202020204"/>
-              <a:buChar char="•"/>
-            </a:pPr>
-            <a:r>
-              <a:rPr lang="en-US" sz="2400">
-                <a:solidFill>
-                  <a:srgbClr val="000000"/>
-                </a:solidFill>
-                <a:latin typeface="Arial" panose="020B0604020202020204" pitchFamily="34" charset="0"/>
-                <a:ea typeface="Touvlo" panose="020B0604030403020204"/>
-                <a:cs typeface="Arial" panose="020B0604020202020204" pitchFamily="34" charset="0"/>
-                <a:sym typeface="Touvlo" panose="020B0604030403020204"/>
-              </a:rPr>
-              <a:t>Ngôn ngữ: PHP, HTML, CSS, JavaScript</a:t>
-            </a:r>
-          </a:p>
-          <a:p>
-            <a:pPr marL="360045" lvl="1" indent="-179705" algn="l">
-              <a:buFont typeface="Arial" panose="020B0604020202020204"/>
-              <a:buChar char="•"/>
-            </a:pPr>
-            <a:r>
-              <a:rPr lang="en-US" sz="2400">
-                <a:solidFill>
-                  <a:srgbClr val="000000"/>
-                </a:solidFill>
-                <a:latin typeface="Arial" panose="020B0604020202020204" pitchFamily="34" charset="0"/>
-                <a:ea typeface="Touvlo" panose="020B0604030403020204"/>
-                <a:cs typeface="Arial" panose="020B0604020202020204" pitchFamily="34" charset="0"/>
-                <a:sym typeface="Touvlo" panose="020B0604030403020204"/>
-              </a:rPr>
-              <a:t>Cơ sở dữ liệu: MySQL</a:t>
-            </a:r>
-          </a:p>
-          <a:p>
-            <a:pPr marL="360045" lvl="1" indent="-179705" algn="l">
-              <a:buFont typeface="Arial" panose="020B0604020202020204"/>
-              <a:buChar char="•"/>
-            </a:pPr>
-            <a:r>
-              <a:rPr lang="en-US" sz="2400">
-                <a:solidFill>
-                  <a:srgbClr val="000000"/>
-                </a:solidFill>
-                <a:latin typeface="Arial" panose="020B0604020202020204" pitchFamily="34" charset="0"/>
-                <a:ea typeface="Touvlo" panose="020B0604030403020204"/>
-                <a:cs typeface="Arial" panose="020B0604020202020204" pitchFamily="34" charset="0"/>
-                <a:sym typeface="Touvlo" panose="020B0604030403020204"/>
-              </a:rPr>
-              <a:t>Giao diện: Bootstrap / AdminLTE</a:t>
-            </a:r>
-          </a:p>
-          <a:p>
-            <a:pPr marL="360045" lvl="1" indent="-179705" algn="l">
-              <a:buFont typeface="Arial" panose="020B0604020202020204"/>
-              <a:buChar char="•"/>
-            </a:pPr>
-            <a:r>
-              <a:rPr lang="en-US" sz="2400">
-                <a:solidFill>
-                  <a:srgbClr val="000000"/>
-                </a:solidFill>
-                <a:latin typeface="Arial" panose="020B0604020202020204" pitchFamily="34" charset="0"/>
-                <a:ea typeface="Touvlo" panose="020B0604030403020204"/>
-                <a:cs typeface="Arial" panose="020B0604020202020204" pitchFamily="34" charset="0"/>
-                <a:sym typeface="Touvlo" panose="020B0604030403020204"/>
-              </a:rPr>
-              <a:t>Môi trường: Laragon</a:t>
-            </a:r>
           </a:p>
         </p:txBody>
       </p:sp>
@@ -4536,7 +4302,7 @@
         </p:nvSpPr>
         <p:spPr>
           <a:xfrm>
-            <a:off x="7690142" y="3610919"/>
+            <a:off x="7690142" y="3229919"/>
             <a:ext cx="4285958" cy="538609"/>
           </a:xfrm>
           <a:prstGeom prst="rect">
@@ -4580,7 +4346,7 @@
         </p:nvGrpSpPr>
         <p:grpSpPr>
           <a:xfrm>
-            <a:off x="7660058" y="10113436"/>
+            <a:off x="7660058" y="9046636"/>
             <a:ext cx="7364042" cy="2375873"/>
             <a:chOff x="0" y="0"/>
             <a:chExt cx="1170533" cy="465858"/>
@@ -4687,7 +4453,7 @@
         </p:nvSpPr>
         <p:spPr>
           <a:xfrm>
-            <a:off x="7842542" y="10001250"/>
+            <a:off x="7842542" y="8934450"/>
             <a:ext cx="4285958" cy="538609"/>
           </a:xfrm>
           <a:prstGeom prst="rect">
@@ -4731,7 +4497,7 @@
         </p:nvSpPr>
         <p:spPr>
           <a:xfrm>
-            <a:off x="7632700" y="10534650"/>
+            <a:off x="7632700" y="9467850"/>
             <a:ext cx="4115253" cy="0"/>
           </a:xfrm>
           <a:prstGeom prst="line">
@@ -4755,7 +4521,7 @@
         </p:nvSpPr>
         <p:spPr>
           <a:xfrm>
-            <a:off x="7556500" y="10610850"/>
+            <a:off x="7556500" y="9544050"/>
             <a:ext cx="5716505" cy="2147511"/>
           </a:xfrm>
           <a:prstGeom prst="rect">
@@ -4848,30 +4614,6 @@
           </a:p>
         </p:txBody>
       </p:sp>
-      <p:sp>
-        <p:nvSpPr>
-          <p:cNvPr id="57" name="AutoShape 57"/>
-          <p:cNvSpPr/>
-          <p:nvPr/>
-        </p:nvSpPr>
-        <p:spPr>
-          <a:xfrm>
-            <a:off x="7666903" y="16402050"/>
-            <a:ext cx="4309197" cy="0"/>
-          </a:xfrm>
-          <a:prstGeom prst="line">
-            <a:avLst/>
-          </a:prstGeom>
-          <a:ln w="28575" cap="flat">
-            <a:solidFill>
-              <a:srgbClr val="000000"/>
-            </a:solidFill>
-            <a:prstDash val="solid"/>
-            <a:headEnd type="none" w="sm" len="sm"/>
-            <a:tailEnd type="none" w="sm" len="sm"/>
-          </a:ln>
-        </p:spPr>
-      </p:sp>
       <p:pic>
         <p:nvPicPr>
           <p:cNvPr id="59" name="Picture 58"/>
@@ -4888,8 +4630,8 @@
         </p:blipFill>
         <p:spPr>
           <a:xfrm>
-            <a:off x="7745935" y="18500679"/>
-            <a:ext cx="7278165" cy="2695232"/>
+            <a:off x="7745935" y="18355018"/>
+            <a:ext cx="7278165" cy="2797076"/>
           </a:xfrm>
           <a:prstGeom prst="rect">
             <a:avLst/>
@@ -4929,7 +4671,7 @@
         </p:blipFill>
         <p:spPr bwMode="auto">
           <a:xfrm>
-            <a:off x="53436" y="15022221"/>
+            <a:off x="53436" y="14801850"/>
             <a:ext cx="7438537" cy="3284829"/>
           </a:xfrm>
           <a:prstGeom prst="rect">
@@ -4963,7 +4705,7 @@
         </p:blipFill>
         <p:spPr>
           <a:xfrm>
-            <a:off x="24372" y="9054988"/>
+            <a:off x="24372" y="8782050"/>
             <a:ext cx="7439725" cy="2962338"/>
           </a:xfrm>
           <a:prstGeom prst="rect">
@@ -4992,7 +4734,7 @@
         <p:spPr>
           <a:xfrm>
             <a:off x="0" y="1"/>
-            <a:ext cx="15112999" cy="1502610"/>
+            <a:ext cx="15112999" cy="1089989"/>
           </a:xfrm>
           <a:custGeom>
             <a:avLst/>
@@ -5048,8 +4790,8 @@
         </p:blipFill>
         <p:spPr>
           <a:xfrm>
-            <a:off x="165100" y="171450"/>
-            <a:ext cx="1143000" cy="1143000"/>
+            <a:off x="81152" y="61470"/>
+            <a:ext cx="936184" cy="936184"/>
           </a:xfrm>
           <a:prstGeom prst="rect">
             <a:avLst/>
@@ -5064,8 +4806,8 @@
         </p:nvSpPr>
         <p:spPr>
           <a:xfrm>
-            <a:off x="1445249" y="314920"/>
-            <a:ext cx="6644651" cy="923330"/>
+            <a:off x="1101284" y="140321"/>
+            <a:ext cx="6644651" cy="875624"/>
           </a:xfrm>
           <a:prstGeom prst="rect">
             <a:avLst/>
@@ -5077,13 +4819,13 @@
           </a:bodyPr>
           <a:lstStyle/>
           <a:p>
-            <a:pPr>
+            <a:pPr algn="ctr">
               <a:lnSpc>
                 <a:spcPts val="3590"/>
               </a:lnSpc>
             </a:pPr>
             <a:r>
-              <a:rPr lang="en-US" sz="2800" b="1" spc="364" smtClean="0">
+              <a:rPr lang="en-US" sz="2000" b="1" spc="364" smtClean="0">
                 <a:solidFill>
                   <a:srgbClr val="001D7A"/>
                 </a:solidFill>
@@ -5092,9 +4834,9 @@
                 <a:cs typeface="Calibri Bold" panose="020F0702030404030204" pitchFamily="34" charset="0"/>
                 <a:sym typeface="Touvlo Bold" panose="020B0804030403020204"/>
               </a:rPr>
-              <a:t>TRƯỜNG KỸ THUẬT VÀ CÔNG NGHỆ 	TRƯỜNG ĐẠI HỌC TRÀ VINH</a:t>
-            </a:r>
-            <a:endParaRPr lang="en-US" sz="2800" b="1" spc="364">
+              <a:t>TRƯỜNG KỸ THUẬT VÀ CÔNG NGHỆ 	</a:t>
+            </a:r>
+            <a:endParaRPr lang="en-US" sz="2000" b="1" spc="364" smtClean="0">
               <a:solidFill>
                 <a:srgbClr val="001D7A"/>
               </a:solidFill>
@@ -5104,6 +4846,46 @@
               <a:sym typeface="Touvlo Bold" panose="020B0804030403020204"/>
             </a:endParaRPr>
           </a:p>
+          <a:p>
+            <a:pPr algn="ctr">
+              <a:lnSpc>
+                <a:spcPts val="3590"/>
+              </a:lnSpc>
+            </a:pPr>
+            <a:r>
+              <a:rPr lang="en-US" sz="2000" b="1" spc="364" smtClean="0">
+                <a:solidFill>
+                  <a:srgbClr val="001D7A"/>
+                </a:solidFill>
+                <a:latin typeface="Calibri Bold" panose="020F0702030404030204" pitchFamily="34" charset="0"/>
+                <a:ea typeface="Touvlo Bold" panose="020B0804030403020204"/>
+                <a:cs typeface="Calibri Bold" panose="020F0702030404030204" pitchFamily="34" charset="0"/>
+                <a:sym typeface="Touvlo Bold" panose="020B0804030403020204"/>
+              </a:rPr>
+              <a:t>TRƯỜNG </a:t>
+            </a:r>
+            <a:r>
+              <a:rPr lang="en-US" sz="2000" b="1" spc="364" smtClean="0">
+                <a:solidFill>
+                  <a:srgbClr val="001D7A"/>
+                </a:solidFill>
+                <a:latin typeface="Calibri Bold" panose="020F0702030404030204" pitchFamily="34" charset="0"/>
+                <a:ea typeface="Touvlo Bold" panose="020B0804030403020204"/>
+                <a:cs typeface="Calibri Bold" panose="020F0702030404030204" pitchFamily="34" charset="0"/>
+                <a:sym typeface="Touvlo Bold" panose="020B0804030403020204"/>
+              </a:rPr>
+              <a:t>ĐẠI HỌC TRÀ VINH</a:t>
+            </a:r>
+            <a:endParaRPr lang="en-US" sz="2000" b="1" spc="364">
+              <a:solidFill>
+                <a:srgbClr val="001D7A"/>
+              </a:solidFill>
+              <a:latin typeface="Calibri Bold" panose="020F0702030404030204" pitchFamily="34" charset="0"/>
+              <a:ea typeface="Touvlo Bold" panose="020B0804030403020204"/>
+              <a:cs typeface="Calibri Bold" panose="020F0702030404030204" pitchFamily="34" charset="0"/>
+              <a:sym typeface="Touvlo Bold" panose="020B0804030403020204"/>
+            </a:endParaRPr>
+          </a:p>
         </p:txBody>
       </p:sp>
       <p:cxnSp>
@@ -5115,7 +4897,7 @@
         <p:spPr>
           <a:xfrm>
             <a:off x="8318500" y="109703"/>
-            <a:ext cx="0" cy="1204747"/>
+            <a:ext cx="0" cy="906242"/>
           </a:xfrm>
           <a:prstGeom prst="line">
             <a:avLst/>
@@ -5144,7 +4926,7 @@
         </p:nvSpPr>
         <p:spPr>
           <a:xfrm>
-            <a:off x="8680200" y="360427"/>
+            <a:off x="8536922" y="166660"/>
             <a:ext cx="6644651" cy="923330"/>
           </a:xfrm>
           <a:prstGeom prst="rect">
@@ -5163,7 +4945,7 @@
               </a:lnSpc>
             </a:pPr>
             <a:r>
-              <a:rPr lang="en-US" sz="2800" b="1" spc="364" smtClean="0">
+              <a:rPr lang="en-US" b="1" spc="364" smtClean="0">
                 <a:solidFill>
                   <a:srgbClr val="001D7A"/>
                 </a:solidFill>
@@ -5182,7 +4964,7 @@
               </a:lnSpc>
             </a:pPr>
             <a:r>
-              <a:rPr lang="en-US" sz="2800" b="1" spc="364" smtClean="0">
+              <a:rPr lang="en-US" b="1" spc="364" smtClean="0">
                 <a:solidFill>
                   <a:srgbClr val="001D7A"/>
                 </a:solidFill>
@@ -5193,7 +4975,7 @@
               </a:rPr>
               <a:t>SVTH: THẠCH NGUYỄN QUẾ ANH</a:t>
             </a:r>
-            <a:endParaRPr lang="en-US" sz="2800" b="1" spc="364">
+            <a:endParaRPr lang="en-US" b="1" spc="364">
               <a:solidFill>
                 <a:srgbClr val="001D7A"/>
               </a:solidFill>
@@ -5221,8 +5003,8 @@
         </p:blipFill>
         <p:spPr>
           <a:xfrm>
-            <a:off x="7722895" y="6071180"/>
-            <a:ext cx="7301205" cy="3625270"/>
+            <a:off x="7722895" y="5581650"/>
+            <a:ext cx="7301205" cy="3048000"/>
           </a:xfrm>
           <a:prstGeom prst="rect">
             <a:avLst/>
@@ -5257,7 +5039,7 @@
         </p:blipFill>
         <p:spPr>
           <a:xfrm>
-            <a:off x="7666903" y="12600526"/>
+            <a:off x="7666903" y="11601450"/>
             <a:ext cx="7357197" cy="3043031"/>
           </a:xfrm>
           <a:prstGeom prst="rect">
@@ -5277,6 +5059,101 @@
           </a:ln>
         </p:spPr>
       </p:pic>
+      <p:pic>
+        <p:nvPicPr>
+          <p:cNvPr id="2" name="Picture 1"/>
+          <p:cNvPicPr>
+            <a:picLocks noChangeAspect="1"/>
+          </p:cNvPicPr>
+          <p:nvPr/>
+        </p:nvPicPr>
+        <p:blipFill>
+          <a:blip r:embed="rId8">
+            <a:extLst>
+              <a:ext uri="{28A0092B-C50C-407E-A947-70E740481C1C}">
+                <a14:useLocalDpi xmlns:a14="http://schemas.microsoft.com/office/drawing/2010/main" val="0"/>
+              </a:ext>
+            </a:extLst>
+          </a:blip>
+          <a:stretch>
+            <a:fillRect/>
+          </a:stretch>
+        </p:blipFill>
+        <p:spPr>
+          <a:xfrm>
+            <a:off x="7667570" y="14823422"/>
+            <a:ext cx="7356529" cy="3263257"/>
+          </a:xfrm>
+          <a:prstGeom prst="rect">
+            <a:avLst/>
+          </a:prstGeom>
+          <a:solidFill>
+            <a:schemeClr val="bg1">
+              <a:lumMod val="95000"/>
+            </a:schemeClr>
+          </a:solidFill>
+          <a:ln w="28575" cap="sq" cmpd="sng">
+            <a:solidFill>
+              <a:schemeClr val="tx1"/>
+            </a:solidFill>
+            <a:prstDash val="lgDashDot"/>
+            <a:miter/>
+          </a:ln>
+        </p:spPr>
+      </p:pic>
+      <p:sp>
+        <p:nvSpPr>
+          <p:cNvPr id="58" name="TextBox 54"/>
+          <p:cNvSpPr txBox="1"/>
+          <p:nvPr/>
+        </p:nvSpPr>
+        <p:spPr>
+          <a:xfrm>
+            <a:off x="9230518" y="14938627"/>
+            <a:ext cx="4285958" cy="512320"/>
+          </a:xfrm>
+          <a:prstGeom prst="rect">
+            <a:avLst/>
+          </a:prstGeom>
+        </p:spPr>
+        <p:txBody>
+          <a:bodyPr lIns="0" tIns="0" rIns="0" bIns="0" rtlCol="0" anchor="t">
+            <a:spAutoFit/>
+          </a:bodyPr>
+          <a:lstStyle/>
+          <a:p>
+            <a:pPr algn="ctr">
+              <a:lnSpc>
+                <a:spcPts val="4200"/>
+              </a:lnSpc>
+              <a:spcBef>
+                <a:spcPct val="0"/>
+              </a:spcBef>
+            </a:pPr>
+            <a:r>
+              <a:rPr lang="en-US" sz="3200" b="1" smtClean="0">
+                <a:solidFill>
+                  <a:srgbClr val="001D7A"/>
+                </a:solidFill>
+                <a:latin typeface="Calibri Bold" panose="020F0702030404030204" pitchFamily="34" charset="0"/>
+                <a:ea typeface="Touvlo Bold" panose="020B0804030403020204"/>
+                <a:cs typeface="Calibri Bold" panose="020F0702030404030204" pitchFamily="34" charset="0"/>
+                <a:sym typeface="Touvlo Bold" panose="020B0804030403020204"/>
+              </a:rPr>
+              <a:t>CÔNG CỤ SỬ DỤNG</a:t>
+            </a:r>
+            <a:endParaRPr lang="en-US" sz="3200" b="1">
+              <a:solidFill>
+                <a:srgbClr val="001D7A"/>
+              </a:solidFill>
+              <a:latin typeface="Calibri Bold" panose="020F0702030404030204" pitchFamily="34" charset="0"/>
+              <a:ea typeface="Touvlo Bold" panose="020B0804030403020204"/>
+              <a:cs typeface="Calibri Bold" panose="020F0702030404030204" pitchFamily="34" charset="0"/>
+              <a:sym typeface="Touvlo Bold" panose="020B0804030403020204"/>
+            </a:endParaRPr>
+          </a:p>
+        </p:txBody>
+      </p:sp>
     </p:spTree>
   </p:cSld>
   <p:clrMapOvr>
